--- a/python-course-ppt/逐节课件/Python讲授课件-单元01.pptx
+++ b/python-course-ppt/逐节课件/Python讲授课件-单元01.pptx
@@ -234,1050 +234,6 @@
     </a:lvl9pPr>
   </p:notesStyle>
 </p:notesMaster>
-</file>
-
-<file path=ppt/notesSlides/notesSlide1.xml><?xml version="1.0" encoding="utf-8"?>
-<p:notes xmlns:a="http://schemas.openxmlformats.org/drawingml/2006/main" xmlns:p="http://schemas.openxmlformats.org/presentationml/2006/main" xmlns:r="http://schemas.openxmlformats.org/officeDocument/2006/relationships">
-  <p:cSld>
-    <p:spTree>
-      <p:nvGrpSpPr>
-        <p:cNvPr id="1" name=""/>
-        <p:cNvGrpSpPr/>
-        <p:nvPr/>
-      </p:nvGrpSpPr>
-      <p:grpSpPr>
-        <a:xfrm>
-          <a:off x="0" y="0"/>
-          <a:ext cx="0" cy="0"/>
-          <a:chOff x="0" y="0"/>
-          <a:chExt cx="0" cy="0"/>
-        </a:xfrm>
-      </p:grpSpPr>
-      <p:sp>
-        <p:nvSpPr>
-          <p:cNvPr id="2" name="讲课提示"/>
-          <p:cNvSpPr txBox="1"/>
-          <p:nvPr/>
-        </p:nvSpPr>
-        <p:spPr>
-          <a:xfrm>
-            <a:off x="457200" y="457200"/>
-            <a:ext cx="6858000" cy="4800600"/>
-          </a:xfrm>
-          <a:prstGeom prst="rect">
-            <a:avLst/>
-          </a:prstGeom>
-        </p:spPr>
-        <p:txBody>
-          <a:bodyPr wrap="square"/>
-          <a:lstStyle/>
-          <a:p>
-            <a:r>
-              <a:rPr lang="zh-CN" dirty="0"/>
-              <a:t>单元 1 · 单元 1 · 变量与简单数据类型</a:t>
-            </a:r>
-          </a:p>
-          <a:p>
-            <a:r>
-              <a:rPr lang="zh-CN" dirty="0"/>
-              <a:t/>
-            </a:r>
-          </a:p>
-          <a:p>
-            <a:r>
-              <a:rPr lang="zh-CN" dirty="0"/>
-              <a:t>本单元包含以下课节：</a:t>
-            </a:r>
-          </a:p>
-          <a:p>
-            <a:r>
-              <a:rPr lang="zh-CN" dirty="0"/>
-              <a:t>· 第 6 节 变量、命名与第一段文字</a:t>
-            </a:r>
-          </a:p>
-          <a:p>
-            <a:r>
-              <a:rPr lang="zh-CN" dirty="0"/>
-              <a:t>· 第 7 节 字符串、数值、布尔与类型转换</a:t>
-            </a:r>
-          </a:p>
-          <a:p>
-            <a:r>
-              <a:rPr lang="zh-CN" dirty="0"/>
-              <a:t>· 第 8 节 动手实战与答案讲评</a:t>
-            </a:r>
-          </a:p>
-          <a:p>
-            <a:r>
-              <a:rPr lang="zh-CN" dirty="0"/>
-              <a:t>· 第 9 节 单元 1 验收复盘</a:t>
-            </a:r>
-          </a:p>
-          <a:p>
-            <a:r>
-              <a:rPr lang="zh-CN" dirty="0"/>
-              <a:t/>
-            </a:r>
-          </a:p>
-          <a:p>
-            <a:r>
-              <a:rPr lang="zh-CN" dirty="0"/>
-              <a:t>开场用 3 分钟讲清：这个单元学完能做出什么，最后会被关卡怎么验。</a:t>
-            </a:r>
-          </a:p>
-        </p:txBody>
-      </p:sp>
-    </p:spTree>
-  </p:cSld>
-  <p:clrMapOvr>
-    <a:masterClrMapping/>
-  </p:clrMapOvr>
-</p:notes>
-</file>
-
-<file path=ppt/notesSlides/notesSlide10.xml><?xml version="1.0" encoding="utf-8"?>
-<p:notes xmlns:a="http://schemas.openxmlformats.org/drawingml/2006/main" xmlns:p="http://schemas.openxmlformats.org/presentationml/2006/main" xmlns:r="http://schemas.openxmlformats.org/officeDocument/2006/relationships">
-  <p:cSld>
-    <p:spTree>
-      <p:nvGrpSpPr>
-        <p:cNvPr id="1" name=""/>
-        <p:cNvGrpSpPr/>
-        <p:nvPr/>
-      </p:nvGrpSpPr>
-      <p:grpSpPr>
-        <a:xfrm>
-          <a:off x="0" y="0"/>
-          <a:ext cx="0" cy="0"/>
-          <a:chOff x="0" y="0"/>
-          <a:chExt cx="0" cy="0"/>
-        </a:xfrm>
-      </p:grpSpPr>
-      <p:sp>
-        <p:nvSpPr>
-          <p:cNvPr id="2" name="讲课提示"/>
-          <p:cNvSpPr txBox="1"/>
-          <p:nvPr/>
-        </p:nvSpPr>
-        <p:spPr>
-          <a:xfrm>
-            <a:off x="457200" y="457200"/>
-            <a:ext cx="6858000" cy="4800600"/>
-          </a:xfrm>
-          <a:prstGeom prst="rect">
-            <a:avLst/>
-          </a:prstGeom>
-        </p:spPr>
-        <p:txBody>
-          <a:bodyPr wrap="square"/>
-          <a:lstStyle/>
-          <a:p>
-            <a:r>
-              <a:rPr lang="zh-CN" dirty="0"/>
-              <a:t>单元 1 小结 · 单元 1 · 小结</a:t>
-            </a:r>
-          </a:p>
-          <a:p>
-            <a:r>
-              <a:rPr lang="zh-CN" dirty="0"/>
-              <a:t/>
-            </a:r>
-          </a:p>
-          <a:p>
-            <a:r>
-              <a:rPr lang="zh-CN" dirty="0"/>
-              <a:t>收尾动作：让学生合上讲义，口述本单元三个最重要的结论；说不出来的，回对应课节。</a:t>
-            </a:r>
-          </a:p>
-          <a:p>
-            <a:r>
-              <a:rPr lang="zh-CN" dirty="0"/>
-              <a:t>然后当场勾一遍本单元课节的「已完成」，没打勾的进下一单元前补掉。</a:t>
-            </a:r>
-          </a:p>
-        </p:txBody>
-      </p:sp>
-    </p:spTree>
-  </p:cSld>
-  <p:clrMapOvr>
-    <a:masterClrMapping/>
-  </p:clrMapOvr>
-</p:notes>
-</file>
-
-<file path=ppt/notesSlides/notesSlide2.xml><?xml version="1.0" encoding="utf-8"?>
-<p:notes xmlns:a="http://schemas.openxmlformats.org/drawingml/2006/main" xmlns:p="http://schemas.openxmlformats.org/presentationml/2006/main" xmlns:r="http://schemas.openxmlformats.org/officeDocument/2006/relationships">
-  <p:cSld>
-    <p:spTree>
-      <p:nvGrpSpPr>
-        <p:cNvPr id="1" name=""/>
-        <p:cNvGrpSpPr/>
-        <p:nvPr/>
-      </p:nvGrpSpPr>
-      <p:grpSpPr>
-        <a:xfrm>
-          <a:off x="0" y="0"/>
-          <a:ext cx="0" cy="0"/>
-          <a:chOff x="0" y="0"/>
-          <a:chExt cx="0" cy="0"/>
-        </a:xfrm>
-      </p:grpSpPr>
-      <p:sp>
-        <p:nvSpPr>
-          <p:cNvPr id="2" name="讲课提示"/>
-          <p:cNvSpPr txBox="1"/>
-          <p:nvPr/>
-        </p:nvSpPr>
-        <p:spPr>
-          <a:xfrm>
-            <a:off x="457200" y="457200"/>
-            <a:ext cx="6858000" cy="4800600"/>
-          </a:xfrm>
-          <a:prstGeom prst="rect">
-            <a:avLst/>
-          </a:prstGeom>
-        </p:spPr>
-        <p:txBody>
-          <a:bodyPr wrap="square"/>
-          <a:lstStyle/>
-          <a:p>
-            <a:r>
-              <a:rPr lang="zh-CN" dirty="0"/>
-              <a:t>第 6 节 · 变量、命名与第一段文字</a:t>
-            </a:r>
-          </a:p>
-          <a:p>
-            <a:r>
-              <a:rPr lang="zh-CN" dirty="0"/>
-              <a:t>单元 1 · 变量与简单数据类型 · W1</a:t>
-            </a:r>
-          </a:p>
-          <a:p>
-            <a:r>
-              <a:rPr lang="zh-CN" dirty="0"/>
-              <a:t/>
-            </a:r>
-          </a:p>
-          <a:p>
-            <a:r>
-              <a:rPr lang="zh-CN" dirty="0"/>
-              <a:t>学习目标：能写出符合 PEP 8 的变量名，理解「变量是贴了标签的盒子」</a:t>
-            </a:r>
-          </a:p>
-          <a:p>
-            <a:r>
-              <a:rPr lang="zh-CN" dirty="0"/>
-              <a:t/>
-            </a:r>
-          </a:p>
-          <a:p>
-            <a:r>
-              <a:rPr lang="zh-CN" dirty="0"/>
-              <a:t>课堂实操（40 分钟，不看答案）：</a:t>
-            </a:r>
-          </a:p>
-          <a:p>
-            <a:r>
-              <a:rPr lang="zh-CN" dirty="0"/>
-              <a:t>· 现场判断 10 个变量名哪些合法</a:t>
-            </a:r>
-          </a:p>
-          <a:p>
-            <a:r>
-              <a:rPr lang="zh-CN" dirty="0"/>
-              <a:t>· 把标签换三次，观察变量重新赋值</a:t>
-            </a:r>
-          </a:p>
-          <a:p>
-            <a:r>
-              <a:rPr lang="zh-CN" dirty="0"/>
-              <a:t/>
-            </a:r>
-          </a:p>
-          <a:p>
-            <a:r>
-              <a:rPr lang="zh-CN" dirty="0"/>
-              <a:t>课后作业：</a:t>
-            </a:r>
-          </a:p>
-          <a:p>
-            <a:r>
-              <a:rPr lang="zh-CN" dirty="0"/>
-              <a:t>· 完成动手练习 1-1 ~ 1-2</a:t>
-            </a:r>
-          </a:p>
-          <a:p>
-            <a:r>
-              <a:rPr lang="zh-CN" dirty="0"/>
-              <a:t/>
-            </a:r>
-          </a:p>
-          <a:p>
-            <a:r>
-              <a:rPr lang="zh-CN" dirty="0"/>
-              <a:t>节奏：讲 20 分钟 → 学员自己敲 40 分钟（不看答案）→ 对讲评自查 20 分钟 → 写作业 10 分钟。</a:t>
-            </a:r>
-          </a:p>
-        </p:txBody>
-      </p:sp>
-    </p:spTree>
-  </p:cSld>
-  <p:clrMapOvr>
-    <a:masterClrMapping/>
-  </p:clrMapOvr>
-</p:notes>
-</file>
-
-<file path=ppt/notesSlides/notesSlide3.xml><?xml version="1.0" encoding="utf-8"?>
-<p:notes xmlns:a="http://schemas.openxmlformats.org/drawingml/2006/main" xmlns:p="http://schemas.openxmlformats.org/presentationml/2006/main" xmlns:r="http://schemas.openxmlformats.org/officeDocument/2006/relationships">
-  <p:cSld>
-    <p:spTree>
-      <p:nvGrpSpPr>
-        <p:cNvPr id="1" name=""/>
-        <p:cNvGrpSpPr/>
-        <p:nvPr/>
-      </p:nvGrpSpPr>
-      <p:grpSpPr>
-        <a:xfrm>
-          <a:off x="0" y="0"/>
-          <a:ext cx="0" cy="0"/>
-          <a:chOff x="0" y="0"/>
-          <a:chExt cx="0" cy="0"/>
-        </a:xfrm>
-      </p:grpSpPr>
-      <p:sp>
-        <p:nvSpPr>
-          <p:cNvPr id="2" name="讲课提示"/>
-          <p:cNvSpPr txBox="1"/>
-          <p:nvPr/>
-        </p:nvSpPr>
-        <p:spPr>
-          <a:xfrm>
-            <a:off x="457200" y="457200"/>
-            <a:ext cx="6858000" cy="4800600"/>
-          </a:xfrm>
-          <a:prstGeom prst="rect">
-            <a:avLst/>
-          </a:prstGeom>
-        </p:spPr>
-        <p:txBody>
-          <a:bodyPr wrap="square"/>
-          <a:lstStyle/>
-          <a:p>
-            <a:r>
-              <a:rPr lang="zh-CN" dirty="0"/>
-              <a:t>第 6 节 · 核心知识点：变量、命名与第一段文字</a:t>
-            </a:r>
-          </a:p>
-          <a:p>
-            <a:r>
-              <a:rPr lang="zh-CN" dirty="0"/>
-              <a:t/>
-            </a:r>
-          </a:p>
-          <a:p>
-            <a:r>
-              <a:rPr lang="zh-CN" dirty="0"/>
-              <a:t>讲这一页时：先让学生说出上节课的结论，再逐块讲要点。</a:t>
-            </a:r>
-          </a:p>
-          <a:p>
-            <a:r>
-              <a:rPr lang="zh-CN" dirty="0"/>
-              <a:t>每讲完一块，问一句「这一步如果写错了，报错会长什么样？」——把错误提前讲。</a:t>
-            </a:r>
-          </a:p>
-          <a:p>
-            <a:r>
-              <a:rPr lang="zh-CN" dirty="0"/>
-              <a:t/>
-            </a:r>
-          </a:p>
-          <a:p>
-            <a:r>
-              <a:rPr lang="zh-CN" dirty="0"/>
-              <a:t>本节目标：能写出符合 PEP 8 的变量名，理解「变量是贴了标签的盒子」</a:t>
-            </a:r>
-          </a:p>
-          <a:p>
-            <a:r>
-              <a:rPr lang="zh-CN" dirty="0"/>
-              <a:t/>
-            </a:r>
-          </a:p>
-          <a:p>
-            <a:r>
-              <a:rPr lang="zh-CN" dirty="0"/>
-              <a:t>看不到懂的地方，回讲义对应小节读一遍，再回来对着这页复述一次——能讲出来才算真懂。</a:t>
-            </a:r>
-          </a:p>
-        </p:txBody>
-      </p:sp>
-    </p:spTree>
-  </p:cSld>
-  <p:clrMapOvr>
-    <a:masterClrMapping/>
-  </p:clrMapOvr>
-</p:notes>
-</file>
-
-<file path=ppt/notesSlides/notesSlide4.xml><?xml version="1.0" encoding="utf-8"?>
-<p:notes xmlns:a="http://schemas.openxmlformats.org/drawingml/2006/main" xmlns:p="http://schemas.openxmlformats.org/presentationml/2006/main" xmlns:r="http://schemas.openxmlformats.org/officeDocument/2006/relationships">
-  <p:cSld>
-    <p:spTree>
-      <p:nvGrpSpPr>
-        <p:cNvPr id="1" name=""/>
-        <p:cNvGrpSpPr/>
-        <p:nvPr/>
-      </p:nvGrpSpPr>
-      <p:grpSpPr>
-        <a:xfrm>
-          <a:off x="0" y="0"/>
-          <a:ext cx="0" cy="0"/>
-          <a:chOff x="0" y="0"/>
-          <a:chExt cx="0" cy="0"/>
-        </a:xfrm>
-      </p:grpSpPr>
-      <p:sp>
-        <p:nvSpPr>
-          <p:cNvPr id="2" name="讲课提示"/>
-          <p:cNvSpPr txBox="1"/>
-          <p:nvPr/>
-        </p:nvSpPr>
-        <p:spPr>
-          <a:xfrm>
-            <a:off x="457200" y="457200"/>
-            <a:ext cx="6858000" cy="4800600"/>
-          </a:xfrm>
-          <a:prstGeom prst="rect">
-            <a:avLst/>
-          </a:prstGeom>
-        </p:spPr>
-        <p:txBody>
-          <a:bodyPr wrap="square"/>
-          <a:lstStyle/>
-          <a:p>
-            <a:r>
-              <a:rPr lang="zh-CN" dirty="0"/>
-              <a:t>第 7 节 · 字符串、数值、布尔与类型转换</a:t>
-            </a:r>
-          </a:p>
-          <a:p>
-            <a:r>
-              <a:rPr lang="zh-CN" dirty="0"/>
-              <a:t>单元 1 · 变量与简单数据类型 · W1</a:t>
-            </a:r>
-          </a:p>
-          <a:p>
-            <a:r>
-              <a:rPr lang="zh-CN" dirty="0"/>
-              <a:t/>
-            </a:r>
-          </a:p>
-          <a:p>
-            <a:r>
-              <a:rPr lang="zh-CN" dirty="0"/>
-              <a:t>学习目标：熟练使用 str 方法与四则运算，掌握 int / float / bool 转换规则</a:t>
-            </a:r>
-          </a:p>
-          <a:p>
-            <a:r>
-              <a:rPr lang="zh-CN" dirty="0"/>
-              <a:t/>
-            </a:r>
-          </a:p>
-          <a:p>
-            <a:r>
-              <a:rPr lang="zh-CN" dirty="0"/>
-              <a:t>课堂实操（40 分钟，不看答案）：</a:t>
-            </a:r>
-          </a:p>
-          <a:p>
-            <a:r>
-              <a:rPr lang="zh-CN" dirty="0"/>
-              <a:t>· 对同一字符串连续调用三种方法并打印每步结果</a:t>
-            </a:r>
-          </a:p>
-          <a:p>
-            <a:r>
-              <a:rPr lang="zh-CN" dirty="0"/>
-              <a:t>· 现场预测 5 个类型转换结果再验证</a:t>
-            </a:r>
-          </a:p>
-          <a:p>
-            <a:r>
-              <a:rPr lang="zh-CN" dirty="0"/>
-              <a:t>· 解释 int("3.9") 为什么会报错</a:t>
-            </a:r>
-          </a:p>
-          <a:p>
-            <a:r>
-              <a:rPr lang="zh-CN" dirty="0"/>
-              <a:t/>
-            </a:r>
-          </a:p>
-          <a:p>
-            <a:r>
-              <a:rPr lang="zh-CN" dirty="0"/>
-              <a:t>课后作业：</a:t>
-            </a:r>
-          </a:p>
-          <a:p>
-            <a:r>
-              <a:rPr lang="zh-CN" dirty="0"/>
-              <a:t>· 完成动手练习 1-3 ~ 1-4</a:t>
-            </a:r>
-          </a:p>
-          <a:p>
-            <a:r>
-              <a:rPr lang="zh-CN" dirty="0"/>
-              <a:t/>
-            </a:r>
-          </a:p>
-          <a:p>
-            <a:r>
-              <a:rPr lang="zh-CN" dirty="0"/>
-              <a:t>节奏：讲 20 分钟 → 学员自己敲 40 分钟（不看答案）→ 对讲评自查 20 分钟 → 写作业 10 分钟。</a:t>
-            </a:r>
-          </a:p>
-        </p:txBody>
-      </p:sp>
-    </p:spTree>
-  </p:cSld>
-  <p:clrMapOvr>
-    <a:masterClrMapping/>
-  </p:clrMapOvr>
-</p:notes>
-</file>
-
-<file path=ppt/notesSlides/notesSlide5.xml><?xml version="1.0" encoding="utf-8"?>
-<p:notes xmlns:a="http://schemas.openxmlformats.org/drawingml/2006/main" xmlns:p="http://schemas.openxmlformats.org/presentationml/2006/main" xmlns:r="http://schemas.openxmlformats.org/officeDocument/2006/relationships">
-  <p:cSld>
-    <p:spTree>
-      <p:nvGrpSpPr>
-        <p:cNvPr id="1" name=""/>
-        <p:cNvGrpSpPr/>
-        <p:nvPr/>
-      </p:nvGrpSpPr>
-      <p:grpSpPr>
-        <a:xfrm>
-          <a:off x="0" y="0"/>
-          <a:ext cx="0" cy="0"/>
-          <a:chOff x="0" y="0"/>
-          <a:chExt cx="0" cy="0"/>
-        </a:xfrm>
-      </p:grpSpPr>
-      <p:sp>
-        <p:nvSpPr>
-          <p:cNvPr id="2" name="讲课提示"/>
-          <p:cNvSpPr txBox="1"/>
-          <p:nvPr/>
-        </p:nvSpPr>
-        <p:spPr>
-          <a:xfrm>
-            <a:off x="457200" y="457200"/>
-            <a:ext cx="6858000" cy="4800600"/>
-          </a:xfrm>
-          <a:prstGeom prst="rect">
-            <a:avLst/>
-          </a:prstGeom>
-        </p:spPr>
-        <p:txBody>
-          <a:bodyPr wrap="square"/>
-          <a:lstStyle/>
-          <a:p>
-            <a:r>
-              <a:rPr lang="zh-CN" dirty="0"/>
-              <a:t>第 7 节 · 核心知识点：字符串、数值、布尔与类型转换</a:t>
-            </a:r>
-          </a:p>
-          <a:p>
-            <a:r>
-              <a:rPr lang="zh-CN" dirty="0"/>
-              <a:t/>
-            </a:r>
-          </a:p>
-          <a:p>
-            <a:r>
-              <a:rPr lang="zh-CN" dirty="0"/>
-              <a:t>讲这一页时：先让学生说出上节课的结论，再逐块讲要点。</a:t>
-            </a:r>
-          </a:p>
-          <a:p>
-            <a:r>
-              <a:rPr lang="zh-CN" dirty="0"/>
-              <a:t>每讲完一块，问一句「这一步如果写错了，报错会长什么样？」——把错误提前讲。</a:t>
-            </a:r>
-          </a:p>
-          <a:p>
-            <a:r>
-              <a:rPr lang="zh-CN" dirty="0"/>
-              <a:t/>
-            </a:r>
-          </a:p>
-          <a:p>
-            <a:r>
-              <a:rPr lang="zh-CN" dirty="0"/>
-              <a:t>本节目标：熟练使用 str 方法与四则运算，掌握 int / float / bool 转换规则</a:t>
-            </a:r>
-          </a:p>
-          <a:p>
-            <a:r>
-              <a:rPr lang="zh-CN" dirty="0"/>
-              <a:t/>
-            </a:r>
-          </a:p>
-          <a:p>
-            <a:r>
-              <a:rPr lang="zh-CN" dirty="0"/>
-              <a:t>看不到懂的地方，回讲义对应小节读一遍，再回来对着这页复述一次——能讲出来才算真懂。</a:t>
-            </a:r>
-          </a:p>
-        </p:txBody>
-      </p:sp>
-    </p:spTree>
-  </p:cSld>
-  <p:clrMapOvr>
-    <a:masterClrMapping/>
-  </p:clrMapOvr>
-</p:notes>
-</file>
-
-<file path=ppt/notesSlides/notesSlide6.xml><?xml version="1.0" encoding="utf-8"?>
-<p:notes xmlns:a="http://schemas.openxmlformats.org/drawingml/2006/main" xmlns:p="http://schemas.openxmlformats.org/presentationml/2006/main" xmlns:r="http://schemas.openxmlformats.org/officeDocument/2006/relationships">
-  <p:cSld>
-    <p:spTree>
-      <p:nvGrpSpPr>
-        <p:cNvPr id="1" name=""/>
-        <p:cNvGrpSpPr/>
-        <p:nvPr/>
-      </p:nvGrpSpPr>
-      <p:grpSpPr>
-        <a:xfrm>
-          <a:off x="0" y="0"/>
-          <a:ext cx="0" cy="0"/>
-          <a:chOff x="0" y="0"/>
-          <a:chExt cx="0" cy="0"/>
-        </a:xfrm>
-      </p:grpSpPr>
-      <p:sp>
-        <p:nvSpPr>
-          <p:cNvPr id="2" name="讲课提示"/>
-          <p:cNvSpPr txBox="1"/>
-          <p:nvPr/>
-        </p:nvSpPr>
-        <p:spPr>
-          <a:xfrm>
-            <a:off x="457200" y="457200"/>
-            <a:ext cx="6858000" cy="4800600"/>
-          </a:xfrm>
-          <a:prstGeom prst="rect">
-            <a:avLst/>
-          </a:prstGeom>
-        </p:spPr>
-        <p:txBody>
-          <a:bodyPr wrap="square"/>
-          <a:lstStyle/>
-          <a:p>
-            <a:r>
-              <a:rPr lang="zh-CN" dirty="0"/>
-              <a:t>第 8 节 · 动手实战与答案讲评</a:t>
-            </a:r>
-          </a:p>
-          <a:p>
-            <a:r>
-              <a:rPr lang="zh-CN" dirty="0"/>
-              <a:t>单元 1 · 变量与简单数据类型 · W1</a:t>
-            </a:r>
-          </a:p>
-          <a:p>
-            <a:r>
-              <a:rPr lang="zh-CN" dirty="0"/>
-              <a:t/>
-            </a:r>
-          </a:p>
-          <a:p>
-            <a:r>
-              <a:rPr lang="zh-CN" dirty="0"/>
-              <a:t>学习目标：独立完成单元 1 练习，能解释类型转换的报错原因</a:t>
-            </a:r>
-          </a:p>
-          <a:p>
-            <a:r>
-              <a:rPr lang="zh-CN" dirty="0"/>
-              <a:t/>
-            </a:r>
-          </a:p>
-          <a:p>
-            <a:r>
-              <a:rPr lang="zh-CN" dirty="0"/>
-              <a:t>课堂实操（40 分钟，不看答案）：</a:t>
-            </a:r>
-          </a:p>
-          <a:p>
-            <a:r>
-              <a:rPr lang="zh-CN" dirty="0"/>
-              <a:t>· 限时 25 分钟独立完成基础档</a:t>
-            </a:r>
-          </a:p>
-          <a:p>
-            <a:r>
-              <a:rPr lang="zh-CN" dirty="0"/>
-              <a:t>· 写一个 BMI 计算器并格式化输出</a:t>
-            </a:r>
-          </a:p>
-          <a:p>
-            <a:r>
-              <a:rPr lang="zh-CN" dirty="0"/>
-              <a:t/>
-            </a:r>
-          </a:p>
-          <a:p>
-            <a:r>
-              <a:rPr lang="zh-CN" dirty="0"/>
-              <a:t>课后作业：</a:t>
-            </a:r>
-          </a:p>
-          <a:p>
-            <a:r>
-              <a:rPr lang="zh-CN" dirty="0"/>
-              <a:t>· 完成进阶档 1-5 ~ 1-8</a:t>
-            </a:r>
-          </a:p>
-          <a:p>
-            <a:r>
-              <a:rPr lang="zh-CN" dirty="0"/>
-              <a:t>· 产出：个人偏好调查问卷</a:t>
-            </a:r>
-          </a:p>
-          <a:p>
-            <a:r>
-              <a:rPr lang="zh-CN" dirty="0"/>
-              <a:t/>
-            </a:r>
-          </a:p>
-          <a:p>
-            <a:r>
-              <a:rPr lang="zh-CN" dirty="0"/>
-              <a:t>节奏：讲 20 分钟 → 学员自己敲 40 分钟（不看答案）→ 对讲评自查 20 分钟 → 写作业 10 分钟。</a:t>
-            </a:r>
-          </a:p>
-        </p:txBody>
-      </p:sp>
-    </p:spTree>
-  </p:cSld>
-  <p:clrMapOvr>
-    <a:masterClrMapping/>
-  </p:clrMapOvr>
-</p:notes>
-</file>
-
-<file path=ppt/notesSlides/notesSlide7.xml><?xml version="1.0" encoding="utf-8"?>
-<p:notes xmlns:a="http://schemas.openxmlformats.org/drawingml/2006/main" xmlns:p="http://schemas.openxmlformats.org/presentationml/2006/main" xmlns:r="http://schemas.openxmlformats.org/officeDocument/2006/relationships">
-  <p:cSld>
-    <p:spTree>
-      <p:nvGrpSpPr>
-        <p:cNvPr id="1" name=""/>
-        <p:cNvGrpSpPr/>
-        <p:nvPr/>
-      </p:nvGrpSpPr>
-      <p:grpSpPr>
-        <a:xfrm>
-          <a:off x="0" y="0"/>
-          <a:ext cx="0" cy="0"/>
-          <a:chOff x="0" y="0"/>
-          <a:chExt cx="0" cy="0"/>
-        </a:xfrm>
-      </p:grpSpPr>
-      <p:sp>
-        <p:nvSpPr>
-          <p:cNvPr id="2" name="讲课提示"/>
-          <p:cNvSpPr txBox="1"/>
-          <p:nvPr/>
-        </p:nvSpPr>
-        <p:spPr>
-          <a:xfrm>
-            <a:off x="457200" y="457200"/>
-            <a:ext cx="6858000" cy="4800600"/>
-          </a:xfrm>
-          <a:prstGeom prst="rect">
-            <a:avLst/>
-          </a:prstGeom>
-        </p:spPr>
-        <p:txBody>
-          <a:bodyPr wrap="square"/>
-          <a:lstStyle/>
-          <a:p>
-            <a:r>
-              <a:rPr lang="zh-CN" dirty="0"/>
-              <a:t>第 8 节 · 核心知识点：动手实战与答案讲评</a:t>
-            </a:r>
-          </a:p>
-          <a:p>
-            <a:r>
-              <a:rPr lang="zh-CN" dirty="0"/>
-              <a:t/>
-            </a:r>
-          </a:p>
-          <a:p>
-            <a:r>
-              <a:rPr lang="zh-CN" dirty="0"/>
-              <a:t>讲这一页时：先让学生说出上节课的结论，再逐块讲要点。</a:t>
-            </a:r>
-          </a:p>
-          <a:p>
-            <a:r>
-              <a:rPr lang="zh-CN" dirty="0"/>
-              <a:t>每讲完一块，问一句「这一步如果写错了，报错会长什么样？」——把错误提前讲。</a:t>
-            </a:r>
-          </a:p>
-          <a:p>
-            <a:r>
-              <a:rPr lang="zh-CN" dirty="0"/>
-              <a:t/>
-            </a:r>
-          </a:p>
-          <a:p>
-            <a:r>
-              <a:rPr lang="zh-CN" dirty="0"/>
-              <a:t>本节目标：独立完成单元 1 练习，能解释类型转换的报错原因</a:t>
-            </a:r>
-          </a:p>
-          <a:p>
-            <a:r>
-              <a:rPr lang="zh-CN" dirty="0"/>
-              <a:t/>
-            </a:r>
-          </a:p>
-          <a:p>
-            <a:r>
-              <a:rPr lang="zh-CN" dirty="0"/>
-              <a:t>看不到懂的地方，回讲义对应小节读一遍，再回来对着这页复述一次——能讲出来才算真懂。</a:t>
-            </a:r>
-          </a:p>
-        </p:txBody>
-      </p:sp>
-    </p:spTree>
-  </p:cSld>
-  <p:clrMapOvr>
-    <a:masterClrMapping/>
-  </p:clrMapOvr>
-</p:notes>
-</file>
-
-<file path=ppt/notesSlides/notesSlide8.xml><?xml version="1.0" encoding="utf-8"?>
-<p:notes xmlns:a="http://schemas.openxmlformats.org/drawingml/2006/main" xmlns:p="http://schemas.openxmlformats.org/presentationml/2006/main" xmlns:r="http://schemas.openxmlformats.org/officeDocument/2006/relationships">
-  <p:cSld>
-    <p:spTree>
-      <p:nvGrpSpPr>
-        <p:cNvPr id="1" name=""/>
-        <p:cNvGrpSpPr/>
-        <p:nvPr/>
-      </p:nvGrpSpPr>
-      <p:grpSpPr>
-        <a:xfrm>
-          <a:off x="0" y="0"/>
-          <a:ext cx="0" cy="0"/>
-          <a:chOff x="0" y="0"/>
-          <a:chExt cx="0" cy="0"/>
-        </a:xfrm>
-      </p:grpSpPr>
-      <p:sp>
-        <p:nvSpPr>
-          <p:cNvPr id="2" name="讲课提示"/>
-          <p:cNvSpPr txBox="1"/>
-          <p:nvPr/>
-        </p:nvSpPr>
-        <p:spPr>
-          <a:xfrm>
-            <a:off x="457200" y="457200"/>
-            <a:ext cx="6858000" cy="4800600"/>
-          </a:xfrm>
-          <a:prstGeom prst="rect">
-            <a:avLst/>
-          </a:prstGeom>
-        </p:spPr>
-        <p:txBody>
-          <a:bodyPr wrap="square"/>
-          <a:lstStyle/>
-          <a:p>
-            <a:r>
-              <a:rPr lang="zh-CN" dirty="0"/>
-              <a:t>第 9 节 · 单元 1 验收复盘</a:t>
-            </a:r>
-          </a:p>
-          <a:p>
-            <a:r>
-              <a:rPr lang="zh-CN" dirty="0"/>
-              <a:t>单元 1 · 变量与简单数据类型 · W1</a:t>
-            </a:r>
-          </a:p>
-          <a:p>
-            <a:r>
-              <a:rPr lang="zh-CN" dirty="0"/>
-              <a:t/>
-            </a:r>
-          </a:p>
-          <a:p>
-            <a:r>
-              <a:rPr lang="zh-CN" dirty="0"/>
-              <a:t>学习目标：确认四种类型、命名规范、类型转换都过关</a:t>
-            </a:r>
-          </a:p>
-          <a:p>
-            <a:r>
-              <a:rPr lang="zh-CN" dirty="0"/>
-              <a:t/>
-            </a:r>
-          </a:p>
-          <a:p>
-            <a:r>
-              <a:rPr lang="zh-CN" dirty="0"/>
-              <a:t>课堂实操（40 分钟，不看答案）：</a:t>
-            </a:r>
-          </a:p>
-          <a:p>
-            <a:r>
-              <a:rPr lang="zh-CN" dirty="0"/>
-              <a:t>· 逐条打勾验收自测</a:t>
-            </a:r>
-          </a:p>
-          <a:p>
-            <a:r>
-              <a:rPr lang="zh-CN" dirty="0"/>
-              <a:t>· 互相考 5 个最易错的类型题</a:t>
-            </a:r>
-          </a:p>
-          <a:p>
-            <a:r>
-              <a:rPr lang="zh-CN" dirty="0"/>
-              <a:t/>
-            </a:r>
-          </a:p>
-          <a:p>
-            <a:r>
-              <a:rPr lang="zh-CN" dirty="0"/>
-              <a:t>课后作业：</a:t>
-            </a:r>
-          </a:p>
-          <a:p>
-            <a:r>
-              <a:rPr lang="zh-CN" dirty="0"/>
-              <a:t>· 完成本单元小结与产出检查</a:t>
-            </a:r>
-          </a:p>
-          <a:p>
-            <a:r>
-              <a:rPr lang="zh-CN" dirty="0"/>
-              <a:t/>
-            </a:r>
-          </a:p>
-          <a:p>
-            <a:r>
-              <a:rPr lang="zh-CN" dirty="0"/>
-              <a:t>节奏：讲 20 分钟 → 学员自己敲 40 分钟（不看答案）→ 对讲评自查 20 分钟 → 写作业 10 分钟。</a:t>
-            </a:r>
-          </a:p>
-        </p:txBody>
-      </p:sp>
-    </p:spTree>
-  </p:cSld>
-  <p:clrMapOvr>
-    <a:masterClrMapping/>
-  </p:clrMapOvr>
-</p:notes>
-</file>
-
-<file path=ppt/notesSlides/notesSlide9.xml><?xml version="1.0" encoding="utf-8"?>
-<p:notes xmlns:a="http://schemas.openxmlformats.org/drawingml/2006/main" xmlns:p="http://schemas.openxmlformats.org/presentationml/2006/main" xmlns:r="http://schemas.openxmlformats.org/officeDocument/2006/relationships">
-  <p:cSld>
-    <p:spTree>
-      <p:nvGrpSpPr>
-        <p:cNvPr id="1" name=""/>
-        <p:cNvGrpSpPr/>
-        <p:nvPr/>
-      </p:nvGrpSpPr>
-      <p:grpSpPr>
-        <a:xfrm>
-          <a:off x="0" y="0"/>
-          <a:ext cx="0" cy="0"/>
-          <a:chOff x="0" y="0"/>
-          <a:chExt cx="0" cy="0"/>
-        </a:xfrm>
-      </p:grpSpPr>
-      <p:sp>
-        <p:nvSpPr>
-          <p:cNvPr id="2" name="讲课提示"/>
-          <p:cNvSpPr txBox="1"/>
-          <p:nvPr/>
-        </p:nvSpPr>
-        <p:spPr>
-          <a:xfrm>
-            <a:off x="457200" y="457200"/>
-            <a:ext cx="6858000" cy="4800600"/>
-          </a:xfrm>
-          <a:prstGeom prst="rect">
-            <a:avLst/>
-          </a:prstGeom>
-        </p:spPr>
-        <p:txBody>
-          <a:bodyPr wrap="square"/>
-          <a:lstStyle/>
-          <a:p>
-            <a:r>
-              <a:rPr lang="zh-CN" dirty="0"/>
-              <a:t>第 9 节 · 核心知识点：单元 1 验收复盘</a:t>
-            </a:r>
-          </a:p>
-          <a:p>
-            <a:r>
-              <a:rPr lang="zh-CN" dirty="0"/>
-              <a:t/>
-            </a:r>
-          </a:p>
-          <a:p>
-            <a:r>
-              <a:rPr lang="zh-CN" dirty="0"/>
-              <a:t>讲这一页时：先让学生说出上节课的结论，再逐块讲要点。</a:t>
-            </a:r>
-          </a:p>
-          <a:p>
-            <a:r>
-              <a:rPr lang="zh-CN" dirty="0"/>
-              <a:t>每讲完一块，问一句「这一步如果写错了，报错会长什么样？」——把错误提前讲。</a:t>
-            </a:r>
-          </a:p>
-          <a:p>
-            <a:r>
-              <a:rPr lang="zh-CN" dirty="0"/>
-              <a:t/>
-            </a:r>
-          </a:p>
-          <a:p>
-            <a:r>
-              <a:rPr lang="zh-CN" dirty="0"/>
-              <a:t>本节目标：确认四种类型、命名规范、类型转换都过关</a:t>
-            </a:r>
-          </a:p>
-          <a:p>
-            <a:r>
-              <a:rPr lang="zh-CN" dirty="0"/>
-              <a:t/>
-            </a:r>
-          </a:p>
-          <a:p>
-            <a:r>
-              <a:rPr lang="zh-CN" dirty="0"/>
-              <a:t>看不到懂的地方，回讲义对应小节读一遍，再回来对着这页复述一次——能讲出来才算真懂。</a:t>
-            </a:r>
-          </a:p>
-        </p:txBody>
-      </p:sp>
-    </p:spTree>
-  </p:cSld>
-  <p:clrMapOvr>
-    <a:masterClrMapping/>
-  </p:clrMapOvr>
-</p:notes>
 </file>
 
 <file path=ppt/slideLayouts/slideLayout1.xml><?xml version="1.0" encoding="utf-8"?>

--- a/python-course-ppt/逐节课件/Python讲授课件-单元01.pptx
+++ b/python-course-ppt/逐节课件/Python讲授课件-单元01.pptx
@@ -1657,7 +1657,7 @@
   <p:cSld>
     <p:spTree>
       <p:nvGrpSpPr>
-        <p:cNvPr id="29" name="" descr="&lt;Slide style={{ width: '1280px', height: '720px', backgroundColor: '#FAFCFE', padding: 0, position: 'relative', overflow: 'hidden' }}&gt;&#13;&#10;    &lt;Box style={{ position: 'absolute', left: 64, top: 36, width: '1152px', flexDirection: 'row', alignItems: 'center', gap: 12 }}&gt;&#13;&#10;        &lt;Box style={{ background: '#0E9B78', borderRadius: 5, padding: '3px 11px' }}&gt;&#13;&#10;            &lt;Text style={{ fontSize: 14, fontWeight: 'bold', color: '#FFFFFF' }}&gt;第 6 节&lt;/Text&gt;&#13;&#10;        &lt;/Box&gt;&#13;&#10;        &lt;Text style={{ fontSize: 30, fontWeight: 'bold', color: '#16232E' }}&gt;核心知识点&lt;/Text&gt;&#13;&#10;        &lt;Text style={{ fontSize: 15, color: '#5A6B7A', marginTop: 10 }}&gt;· 变量、命名与第一段文字&lt;/Text&gt;&#13;&#10;    &lt;/Box&gt;&#13;&#10;    &lt;Box style={{ position: 'absolute', left: 0, top: 0, width: '1280px', height: '720px' }}&gt;&#13;&#10;        &lt;svg width='1280' height='720' viewBox='0 0 1280 720'&gt;&#13;&#10;            &lt;rect x='64' y='96' width='368' height='330' rx='12' fill='#FFFFFF' stroke='#D8E3EE' /&gt;&lt;rect x='64' y='96' width='368' height='4' rx='2' fill='#1F5FA8' /&gt;&lt;text x='82' y='130' fontSize='15.5' fontWeight='bold' fill='#1F5FA8' textAnchor='start' fontFamily='Microsoft YaHei'&gt;2.1 变量：一个贴了标签的盒子&lt;/text&gt;&lt;text x='82' y='169.0' fontSize='13' fill='#3A4A58' textAnchor='start' fontFamily='Microsoft YaHei'&gt;· 变量不是&quot;存储数据的空间&quot;，更准确的说法是：一个指&lt;/text&gt;&lt;text x='82' y='188.5' fontSize='13' fill='#3A4A58' textAnchor='start' fontFamily='Microsoft YaHei'&gt;向某个数据的名字。&lt;/text&gt;&lt;rect x='468' y='96' width='368' height='330' rx='12' fill='#FFFFFF' stroke='#D8E3EE' /&gt;&lt;rect x='468' y='96' width='368' height='4' rx='2' fill='#1F5FA8' /&gt;&lt;text x='486' y='130' fontSize='15.5' fontWeight='bold' fill='#1F5FA8' textAnchor='start' fontFamily='Microsoft YaHei'&gt;2.2 命名规则：为什么 my-var 和 2var 不行&lt;/text&gt;&lt;text x='486' y='169.0' fontSize='13' fill='#3A4A58' textAnchor='start' fontFamily='Microsoft YaHei'&gt;· 好：user_name、total_price、item2&lt;/text&gt;&lt;text x='486' y='197.5' fontSize='13' fill='#3A4A58' textAnchor='start' fontFamily='Microsoft YaHei'&gt;· 差：UserName、userName、用户名&lt;/text&gt;&lt;rect x='872' y='96' width='368' height='330' rx='12' fill='#FFFFFF' stroke='#D8E3EE' /&gt;&lt;rect x='872' y='96' width='368' height='4' rx='2' fill='#1F5FA8' /&gt;&lt;text x='890' y='130' fontSize='15.5' fontWeight='bold' fill='#1F5FA8' textAnchor='start' fontFamily='Microsoft YaHei'&gt;2.3 字符串 str：带引号的文字&lt;/text&gt;&lt;text x='890' y='169.0' fontSize='13' fill='#3A4A58' textAnchor='start' fontFamily='Microsoft YaHei'&gt;· 不可变性是字符串最重要的性质：字符串一旦创建就不能&lt;/text&gt;&lt;text x='890' y='188.5' fontSize='13' fill='#3A4A58' textAnchor='start' fontFamily='Microsoft YaHei'&gt;原地修改。所有&quot;看起来在改&quot;的方法，实际上都是返回&lt;/text&gt;&lt;text x='890' y='208.0' fontSize='13' fill='#3A4A58' textAnchor='start' fontFamily='Microsoft YaHei'&gt;了…&lt;/text&gt;&lt;rect x='64' y='574' width='1152' height='66' rx='12' fill='#EEF5FB' /&gt;&lt;text x='84' y='616' fontSize='14' fill='#243444' textAnchor='start' fontFamily='Microsoft YaHei'&gt;看不懂的地方先回讲义对应小节读一遍，再回来对着这页复述一次——能讲出来才算真懂。&lt;/text&gt;&#13;&#10;            &lt;text x='64' y='684' fontSize='13' fill='#8A9AAA' fontFamily='Microsoft YaHei'&gt;Python 讲授课件 · 逐节版&lt;/text&gt;&#13;&#10;            &lt;text x='1216' y='684' fontSize='13' fill='#8A9AAA' textAnchor='end' fontFamily='Microsoft YaHei'&gt;单元 1 · 第 6 节&lt;/text&gt;&#13;&#10;        &lt;/svg&gt;&#13;&#10;    &lt;/Box&gt;&#13;&#10;&lt;/Slide&gt;&#13;&#10;"/>
+        <p:cNvPr id="29" name="" descr="&lt;Slide style={{ width: '1280px', height: '720px', backgroundColor: '#FAFCFE', padding: 0, position: 'relative', overflow: 'hidden' }}&gt;&#13;&#10;    &lt;Box style={{ position: 'absolute', left: 64, top: 36, width: '1152px', flexDirection: 'row', alignItems: 'center', gap: 12 }}&gt;&#13;&#10;        &lt;Box style={{ background: '#0E9B78', borderRadius: 5, padding: '3px 11px' }}&gt;&#13;&#10;            &lt;Text style={{ fontSize: 14, fontWeight: 'bold', color: '#FFFFFF' }}&gt;第 6 节&lt;/Text&gt;&#13;&#10;        &lt;/Box&gt;&#13;&#10;        &lt;Text style={{ fontSize: 30, fontWeight: 'bold', color: '#16232E' }}&gt;核心知识点&lt;/Text&gt;&#13;&#10;        &lt;Text style={{ fontSize: 15, color: '#5A6B7A', marginTop: 10 }}&gt;· 变量、命名与第一段文字&lt;/Text&gt;&#13;&#10;    &lt;/Box&gt;&#13;&#10;    &lt;Box style={{ position: 'absolute', left: 0, top: 0, width: '1280px', height: '720px' }}&gt;&#13;&#10;        &lt;svg width='1280' height='720' viewBox='0 0 1280 720'&gt;&#13;&#10;            &lt;rect x='64' y='96' width='368' height='330' rx='12' fill='#FFFFFF' stroke='#D8E3EE' /&gt;&lt;rect x='64' y='96' width='368' height='4' rx='2' fill='#1F5FA8' /&gt;&lt;text x='82' y='130' fontSize='15.5' fontWeight='bold' fill='#1F5FA8' textAnchor='start' fontFamily='Microsoft YaHei'&gt;2.1 变量：一个贴了标签的盒子&lt;/text&gt;&lt;text x='82' y='169.0' fontSize='13' fill='#3A4A58' textAnchor='start' fontFamily='Microsoft YaHei'&gt;· 变量不是&quot;存储数据的空间&quot;，更准确的说法是：&lt;/text&gt;&lt;text x='82' y='188.5' fontSize='13' fill='#3A4A58' textAnchor='start' fontFamily='Microsoft YaHei'&gt;一个指向某个数据的名字。&lt;/text&gt;&lt;rect x='468' y='96' width='368' height='330' rx='12' fill='#FFFFFF' stroke='#D8E3EE' /&gt;&lt;rect x='468' y='96' width='368' height='4' rx='2' fill='#1F5FA8' /&gt;&lt;text x='486' y='130' fontSize='15.5' fontWeight='bold' fill='#1F5FA8' textAnchor='start' fontFamily='Microsoft YaHei'&gt;2.2 命名规则：为什么 my-var 和 2var 不行&lt;/text&gt;&lt;text x='486' y='169.0' fontSize='13' fill='#3A4A58' textAnchor='start' fontFamily='Microsoft YaHei'&gt;· 好：user_name、total_price、item2&lt;/text&gt;&lt;text x='486' y='197.5' fontSize='13' fill='#3A4A58' textAnchor='start' fontFamily='Microsoft YaHei'&gt;· 差：UserName、userName、用户名&lt;/text&gt;&lt;rect x='872' y='96' width='368' height='330' rx='12' fill='#FFFFFF' stroke='#D8E3EE' /&gt;&lt;rect x='872' y='96' width='368' height='4' rx='2' fill='#1F5FA8' /&gt;&lt;text x='890' y='130' fontSize='15.5' fontWeight='bold' fill='#1F5FA8' textAnchor='start' fontFamily='Microsoft YaHei'&gt;2.3 字符串 str：带引号的文字&lt;/text&gt;&lt;text x='890' y='169.0' fontSize='13' fill='#3A4A58' textAnchor='start' fontFamily='Microsoft YaHei'&gt;· 不可变性&lt;/text&gt;&lt;rect x='64' y='574' width='1152' height='66' rx='12' fill='#EEF5FB' /&gt;&lt;text x='84' y='616' fontSize='14' fill='#243444' textAnchor='start' fontFamily='Microsoft YaHei'&gt;看不懂的地方先回讲义对应小节读一遍，再回来对着这页复述一次——能讲出来才算真懂。&lt;/text&gt;&#13;&#10;            &lt;text x='64' y='684' fontSize='13' fill='#8A9AAA' fontFamily='Microsoft YaHei'&gt;Python 讲授课件 · 逐节版&lt;/text&gt;&#13;&#10;            &lt;text x='1216' y='684' fontSize='13' fill='#8A9AAA' textAnchor='end' fontFamily='Microsoft YaHei'&gt;单元 1 · 第 6 节&lt;/text&gt;&#13;&#10;        &lt;/svg&gt;&#13;&#10;    &lt;/Box&gt;&#13;&#10;&lt;/Slide&gt;&#13;&#10;"/>
         <p:cNvGrpSpPr/>
         <p:nvPr/>
       </p:nvGrpSpPr>
@@ -2088,7 +2088,7 @@
   <p:cSld>
     <p:spTree>
       <p:nvGrpSpPr>
-        <p:cNvPr id="42" name="" descr="&lt;Slide style={{ width: '1280px', height: '720px', backgroundColor: '#FAFCFE', padding: 0, position: 'relative', overflow: 'hidden' }}&gt;&#13;&#10;    &lt;Box style={{ position: 'absolute', left: 64, top: 36, width: '1152px', flexDirection: 'row', alignItems: 'center', gap: 12 }}&gt;&#13;&#10;        &lt;Box style={{ background: '#0E9B78', borderRadius: 5, padding: '3px 11px' }}&gt;&#13;&#10;            &lt;Text style={{ fontSize: 14, fontWeight: 'bold', color: '#FFFFFF' }}&gt;第 7 节&lt;/Text&gt;&#13;&#10;        &lt;/Box&gt;&#13;&#10;        &lt;Text style={{ fontSize: 30, fontWeight: 'bold', color: '#16232E' }}&gt;核心知识点&lt;/Text&gt;&#13;&#10;        &lt;Text style={{ fontSize: 15, color: '#5A6B7A', marginTop: 10 }}&gt;· 字符串、数值、布尔与类型转换&lt;/Text&gt;&#13;&#10;    &lt;/Box&gt;&#13;&#10;    &lt;Box style={{ position: 'absolute', left: 0, top: 0, width: '1280px', height: '720px' }}&gt;&#13;&#10;        &lt;svg width='1280' height='720' viewBox='0 0 1280 720'&gt;&#13;&#10;            &lt;rect x='64' y='96' width='368' height='330' rx='12' fill='#FFFFFF' stroke='#D8E3EE' /&gt;&lt;rect x='64' y='96' width='368' height='4' rx='2' fill='#1F5FA8' /&gt;&lt;text x='82' y='130' fontSize='15.5' fontWeight='bold' fill='#1F5FA8' textAnchor='start' fontFamily='Microsoft YaHei'&gt;2.4 整数 int 与浮点数 float&lt;/text&gt;&lt;text x='82' y='169.0' fontSize='13' fill='#3A4A58' textAnchor='start' fontFamily='Microsoft YaHei'&gt;· int 是整数（-3、0、42），float 是小数（3.14、-0&lt;/text&gt;&lt;text x='82' y='188.5' fontSize='13' fill='#3A4A58' textAnchor='start' fontFamily='Microsoft YaHei'&gt;.5）。&lt;/text&gt;&lt;rect x='468' y='96' width='368' height='330' rx='12' fill='#FFFFFF' stroke='#D8E3EE' /&gt;&lt;rect x='468' y='96' width='368' height='4' rx='2' fill='#1F5FA8' /&gt;&lt;text x='486' y='130' fontSize='15.5' fontWeight='bold' fill='#1F5FA8' textAnchor='start' fontFamily='Microsoft YaHei'&gt;2.5 布尔值 bool：只有两个取值&lt;/text&gt;&lt;text x='486' y='169.0' fontSize='13' fill='#3A4A58' textAnchor='start' fontFamily='Microsoft YaHei'&gt;· 布尔值只有 True 和 False，首字母必须大写，这是初&lt;/text&gt;&lt;text x='486' y='188.5' fontSize='13' fill='#3A4A58' textAnchor='start' fontFamily='Microsoft YaHei'&gt;学者的高频语法错误（写 true 会报 N…&lt;/text&gt;&lt;rect x='872' y='96' width='368' height='330' rx='12' fill='#FFFFFF' stroke='#D8E3EE' /&gt;&lt;rect x='872' y='96' width='368' height='4' rx='2' fill='#1F5FA8' /&gt;&lt;text x='890' y='130' fontSize='15.5' fontWeight='bold' fill='#1F5FA8' textAnchor='start' fontFamily='Microsoft YaHei'&gt;2.6 类型转换：把一种类型的标签换成另一种&lt;/text&gt;&lt;text x='890' y='169.0' fontSize='13' fill='#3A4A58' textAnchor='start' fontFamily='Microsoft YaHei'&gt;· 转换可能失败，失败会报 ValueError：&lt;/text&gt;&lt;text x='890' y='197.5' fontSize='13' fill='#3A4A58' textAnchor='start' fontFamily='Microsoft YaHei'&gt;· int(&quot;abc&quot;) → ValueError: invalid literal for&lt;/text&gt;&lt;text x='890' y='217.0' fontSize='13' fill='#3A4A58' textAnchor='start' fontFamily='Microsoft YaHei'&gt; int()（…&lt;/text&gt;&lt;text x='890' y='245.5' fontSize='13' fill='#3A4A58' textAnchor='start' fontFamily='Microsoft YaHei'&gt;· int(&quot;3.9&quot;) → ValueError（带小数点的字符串不能&lt;/text&gt;&lt;text x='890' y='265.0' fontSize='13' fill='#3A4A58' textAnchor='start' fontFamily='Microsoft YaHei'&gt;直接转整数，必须先 float 或…&lt;/text&gt;&lt;text x='64' y='470' fontSize='14.5' fontWeight='bold' fill='#0E9B78' textAnchor='start' fontFamily='Microsoft YaHei'&gt;本节的代码示例&lt;/text&gt;&lt;text x='64' y='500' fontSize='13' fill='#3A4A58' textAnchor='start' fontFamily='Microsoft YaHei'&gt;· 四种类型与 type()&lt;/text&gt;&lt;text x='468' y='500' fontSize='13' fill='#3A4A58' textAnchor='start' fontFamily='Microsoft YaHei'&gt;· 变量重新赋值与命名规范&lt;/text&gt;&lt;text x='872' y='500' fontSize='13' fill='#3A4A58' textAnchor='start' fontFamily='Microsoft YaHei'&gt;· 字符串常用方法&lt;/text&gt;&lt;rect x='64' y='574' width='1152' height='66' rx='12' fill='#EEF5FB' /&gt;&lt;text x='84' y='616' fontSize='14' fill='#243444' textAnchor='start' fontFamily='Microsoft YaHei'&gt;看不懂的地方先回讲义对应小节读一遍，再回来对着这页复述一次——能讲出来才算真懂。&lt;/text&gt;&#13;&#10;            &lt;text x='64' y='684' fontSize='13' fill='#8A9AAA' fontFamily='Microsoft YaHei'&gt;Python 讲授课件 · 逐节版&lt;/text&gt;&#13;&#10;            &lt;text x='1216' y='684' fontSize='13' fill='#8A9AAA' textAnchor='end' fontFamily='Microsoft YaHei'&gt;单元 1 · 第 7 节&lt;/text&gt;&#13;&#10;        &lt;/svg&gt;&#13;&#10;    &lt;/Box&gt;&#13;&#10;&lt;/Slide&gt;&#13;&#10;"/>
+        <p:cNvPr id="42" name="" descr="&lt;Slide style={{ width: '1280px', height: '720px', backgroundColor: '#FAFCFE', padding: 0, position: 'relative', overflow: 'hidden' }}&gt;&#13;&#10;    &lt;Box style={{ position: 'absolute', left: 64, top: 36, width: '1152px', flexDirection: 'row', alignItems: 'center', gap: 12 }}&gt;&#13;&#10;        &lt;Box style={{ background: '#0E9B78', borderRadius: 5, padding: '3px 11px' }}&gt;&#13;&#10;            &lt;Text style={{ fontSize: 14, fontWeight: 'bold', color: '#FFFFFF' }}&gt;第 7 节&lt;/Text&gt;&#13;&#10;        &lt;/Box&gt;&#13;&#10;        &lt;Text style={{ fontSize: 30, fontWeight: 'bold', color: '#16232E' }}&gt;核心知识点&lt;/Text&gt;&#13;&#10;        &lt;Text style={{ fontSize: 15, color: '#5A6B7A', marginTop: 10 }}&gt;· 字符串、数值、布尔与类型转换&lt;/Text&gt;&#13;&#10;    &lt;/Box&gt;&#13;&#10;    &lt;Box style={{ position: 'absolute', left: 0, top: 0, width: '1280px', height: '720px' }}&gt;&#13;&#10;        &lt;svg width='1280' height='720' viewBox='0 0 1280 720'&gt;&#13;&#10;            &lt;rect x='64' y='96' width='368' height='330' rx='12' fill='#FFFFFF' stroke='#D8E3EE' /&gt;&lt;rect x='64' y='96' width='368' height='4' rx='2' fill='#1F5FA8' /&gt;&lt;text x='82' y='130' fontSize='15.5' fontWeight='bold' fill='#1F5FA8' textAnchor='start' fontFamily='Microsoft YaHei'&gt;2.4 整数 int 与浮点数 float&lt;/text&gt;&lt;text x='82' y='169.0' fontSize='13' fill='#3A4A58' textAnchor='start' fontFamily='Microsoft YaHei'&gt;· int 是整数（-3、0、42），float 是小数（3.14、&lt;/text&gt;&lt;text x='82' y='188.5' fontSize='13' fill='#3A4A58' textAnchor='start' fontFamily='Microsoft YaHei'&gt;-0.5）。&lt;/text&gt;&lt;rect x='468' y='96' width='368' height='330' rx='12' fill='#FFFFFF' stroke='#D8E3EE' /&gt;&lt;rect x='468' y='96' width='368' height='4' rx='2' fill='#1F5FA8' /&gt;&lt;text x='486' y='130' fontSize='15.5' fontWeight='bold' fill='#1F5FA8' textAnchor='start' fontFamily='Microsoft YaHei'&gt;2.5 布尔值 bool：只有两个取值&lt;/text&gt;&lt;text x='486' y='169.0' fontSize='13' fill='#3A4A58' textAnchor='start' fontFamily='Microsoft YaHei'&gt;· 布尔值只有 True 和 False，首字母必须大写…&lt;/text&gt;&lt;rect x='872' y='96' width='368' height='330' rx='12' fill='#FFFFFF' stroke='#D8E3EE' /&gt;&lt;rect x='872' y='96' width='368' height='4' rx='2' fill='#1F5FA8' /&gt;&lt;text x='890' y='130' fontSize='15.5' fontWeight='bold' fill='#1F5FA8' textAnchor='start' fontFamily='Microsoft YaHei'&gt;2.6 类型转换：把一种类型的标签换成另一种&lt;/text&gt;&lt;text x='890' y='169.0' fontSize='13' fill='#3A4A58' textAnchor='start' fontFamily='Microsoft YaHei'&gt;· 转换可能失败&lt;/text&gt;&lt;text x='890' y='197.5' fontSize='13' fill='#3A4A58' textAnchor='start' fontFamily='Microsoft YaHei'&gt;· int(&quot;abc&quot;) → ValueError: invalid literal&lt;/text&gt;&lt;text x='890' y='217.0' fontSize='13' fill='#3A4A58' textAnchor='start' fontFamily='Microsoft YaHei'&gt;for int()（…&lt;/text&gt;&lt;text x='890' y='245.5' fontSize='13' fill='#3A4A58' textAnchor='start' fontFamily='Microsoft YaHei'&gt;· int(&quot;3.9&quot;) → ValueError（带小数点的字符串不能&lt;/text&gt;&lt;text x='890' y='265.0' fontSize='13' fill='#3A4A58' textAnchor='start' fontFamily='Microsoft YaHei'&gt;直接转整数…&lt;/text&gt;&lt;text x='64' y='470' fontSize='14.5' fontWeight='bold' fill='#0E9B78' textAnchor='start' fontFamily='Microsoft YaHei'&gt;本节的代码示例&lt;/text&gt;&lt;text x='64' y='500' fontSize='13' fill='#3A4A58' textAnchor='start' fontFamily='Microsoft YaHei'&gt;· 四种类型与 type()&lt;/text&gt;&lt;text x='468' y='500' fontSize='13' fill='#3A4A58' textAnchor='start' fontFamily='Microsoft YaHei'&gt;· 变量重新赋值与命名规范&lt;/text&gt;&lt;text x='872' y='500' fontSize='13' fill='#3A4A58' textAnchor='start' fontFamily='Microsoft YaHei'&gt;· 字符串常用方法&lt;/text&gt;&lt;rect x='64' y='574' width='1152' height='66' rx='12' fill='#EEF5FB' /&gt;&lt;text x='84' y='616' fontSize='14' fill='#243444' textAnchor='start' fontFamily='Microsoft YaHei'&gt;看不懂的地方先回讲义对应小节读一遍，再回来对着这页复述一次——能讲出来才算真懂。&lt;/text&gt;&#13;&#10;            &lt;text x='64' y='684' fontSize='13' fill='#8A9AAA' fontFamily='Microsoft YaHei'&gt;Python 讲授课件 · 逐节版&lt;/text&gt;&#13;&#10;            &lt;text x='1216' y='684' fontSize='13' fill='#8A9AAA' textAnchor='end' fontFamily='Microsoft YaHei'&gt;单元 1 · 第 7 节&lt;/text&gt;&#13;&#10;        &lt;/svg&gt;&#13;&#10;    &lt;/Box&gt;&#13;&#10;&lt;/Slide&gt;&#13;&#10;"/>
         <p:cNvGrpSpPr/>
         <p:nvPr/>
       </p:nvGrpSpPr>

--- a/python-course-ppt/逐节课件/Python讲授课件-单元01.pptx
+++ b/python-course-ppt/逐节课件/Python讲授课件-单元01.pptx
@@ -553,7 +553,7 @@
   <p:cSld>
     <p:spTree>
       <p:nvGrpSpPr>
-        <p:cNvPr id="1" name="" descr="&lt;Slide style={{ width: '1280px', height: '720px', backgroundColor: '#FAFCFE', padding: 0, position: 'relative', overflow: 'hidden' }}&gt;&#13;&#10;    &lt;Box style={{ position: 'absolute', left: 0, top: 0, width: '1280px', height: '150px', background: '#1F5FA8' }} /&gt;&#13;&#10;    &lt;Box style={{ position: 'absolute', left: 64, top: 34, width: '1152px', flexDirection: 'column' }}&gt;&#13;&#10;        &lt;Text style={{ fontSize: 15, fontWeight: 'bold', color: '#BFD9F2', letterSpacing: 2 }}&gt;阶段 1 · 单元 1&lt;/Text&gt;&#13;&#10;        &lt;Text style={{ fontSize: 38, fontWeight: 'bold', color: '#FFFFFF', marginTop: 6 }}&gt;变量与简单数据类型&lt;/Text&gt;&#13;&#10;    &lt;/Box&gt;&#13;&#10;    &lt;Box style={{ position: 'absolute', left: 64, top: 168, width: '1152px', height: 470 }}&gt;&#13;&#10;        &lt;svg width='1152' height='470' viewBox='0 0 1152 470'&gt;&#13;&#10;            &lt;text x='0' y='18' fontSize='15' fontWeight='bold' fill='#16232E' fontFamily='Microsoft YaHei'&gt;本单元共 4 节课&lt;/text&gt;&#13;&#10;            &lt;rect x='0' y='196' width='1152' height='38' rx='7' fill='#FFFFFF' /&gt;&lt;text x='16' y='221' fontSize='15' fontWeight='bold' fill='#1F5FA8' fontFamily='Microsoft YaHei'&gt;第 6 节&lt;/text&gt;&lt;text x='96' y='221' fontSize='15' fill='#16232E' fontFamily='Microsoft YaHei'&gt;变量、命名与第一段文字&lt;/text&gt;&lt;text x='1080' y='221' fontSize='13' fill='#5A6B7A' textAnchor='end' fontFamily='Microsoft YaHei'&gt;W1&lt;/text&gt;&lt;rect x='0' y='238' width='1152' height='38' rx='7' fill='#F2F7FD' /&gt;&lt;text x='16' y='263' fontSize='15' fontWeight='bold' fill='#1F5FA8' fontFamily='Microsoft YaHei'&gt;第 7 节&lt;/text&gt;&lt;text x='96' y='263' fontSize='15' fill='#16232E' fontFamily='Microsoft YaHei'&gt;字符串、数值、布尔与类型转换&lt;/text&gt;&lt;text x='1080' y='263' fontSize='13' fill='#5A6B7A' textAnchor='end' fontFamily='Microsoft YaHei'&gt;W1&lt;/text&gt;&lt;rect x='0' y='280' width='1152' height='38' rx='7' fill='#FFFFFF' /&gt;&lt;text x='16' y='305' fontSize='15' fontWeight='bold' fill='#1F5FA8' fontFamily='Microsoft YaHei'&gt;第 8 节&lt;/text&gt;&lt;text x='96' y='305' fontSize='15' fill='#16232E' fontFamily='Microsoft YaHei'&gt;动手实战与答案讲评&lt;/text&gt;&lt;text x='1080' y='305' fontSize='13' fill='#5A6B7A' textAnchor='end' fontFamily='Microsoft YaHei'&gt;W1&lt;/text&gt;&lt;rect x='0' y='322' width='1152' height='38' rx='7' fill='#F2F7FD' /&gt;&lt;text x='16' y='347' fontSize='15' fontWeight='bold' fill='#1F5FA8' fontFamily='Microsoft YaHei'&gt;第 9 节&lt;/text&gt;&lt;text x='96' y='347' fontSize='15' fill='#16232E' fontFamily='Microsoft YaHei'&gt;单元 1 验收复盘&lt;/text&gt;&lt;text x='1080' y='347' fontSize='13' fill='#5A6B7A' textAnchor='end' fontFamily='Microsoft YaHei'&gt;W1&lt;/text&gt;&#13;&#10;        &lt;/svg&gt;&#13;&#10;    &lt;/Box&gt;&#13;&#10;    &lt;Box style={{ position: 'absolute', left: 64, bottom: 22, width: '1152px', flexDirection: 'row', justifyContent: 'space-between' }}&gt;&#13;&#10;        &lt;Text style={{ fontSize: 13, color: '#8A9AAA' }}&gt;Python 讲授课件 · 逐节版&lt;/Text&gt;&#13;&#10;        &lt;Text style={{ fontSize: 13, color: '#8A9AAA' }}&gt;单元 1 · 封面&lt;/Text&gt;&#13;&#10;    &lt;/Box&gt;&#13;&#10;&lt;/Slide&gt;&#13;&#10;"/>
+        <p:cNvPr id="1" name="" descr="&lt;Slide style={{ width: '1280px', height: '720px', backgroundColor: '#FAFCFE', padding: 0, position: 'relative', overflow: 'hidden' }}&gt;&#13;&#10;    &lt;Box style={{ position: 'absolute', left: 0, top: 0, width: '1280px', height: '150px', background: '#1F5FA8' }} /&gt;&#13;&#10;    &lt;Box style={{ position: 'absolute', left: 64, top: 34, width: '1152px', flexDirection: 'column' }}&gt;&#13;&#10;        &lt;Text style={{ fontSize: 15, fontWeight: 'bold', color: '#BFD9F2', letterSpacing: 2 }}&gt;阶段 1 · 单元 1&lt;/Text&gt;&#13;&#10;        &lt;Text style={{ fontSize: 38, fontWeight: 'bold', color: '#FFFFFF', marginTop: 6 }}&gt;变量与简单数据类型&lt;/Text&gt;&#13;&#10;    &lt;/Box&gt;&#13;&#10;    &lt;Box style={{ position: 'absolute', left: 64, top: 168, width: '1152px', height: 470 }}&gt;&#13;&#10;        &lt;svg width='1152' height='470' viewBox='0 0 1152 470'&gt;&#13;&#10;            &lt;text x='0' y='18' fontSize='15' fontWeight='bold' fill='#16232E' fontFamily='Microsoft YaHei'&gt;本单元共 4 节课&lt;/text&gt;&#13;&#10;            &lt;rect x='0' y='56.0' width='1152' height='48.0' rx='7' fill='#FFFFFF' /&gt;&lt;text x='16' y='85.0' fontSize='15' fontWeight='bold' fill='#1F5FA8' fontFamily='Microsoft YaHei'&gt;第 6 节&lt;/text&gt;&lt;text x='96' y='85.0' fontSize='15' fill='#16232E' fontFamily='Microsoft YaHei'&gt;变量、命名与第一段文字&lt;/text&gt;&lt;text x='1080' y='85.0' fontSize='13' fill='#5A6B7A' textAnchor='end' fontFamily='Microsoft YaHei'&gt;W1&lt;/text&gt;&lt;rect x='0' y='155.0' width='1152' height='48.0' rx='7' fill='#F2F7FD' /&gt;&lt;text x='16' y='184.0' fontSize='15' fontWeight='bold' fill='#1F5FA8' fontFamily='Microsoft YaHei'&gt;第 7 节&lt;/text&gt;&lt;text x='96' y='184.0' fontSize='15' fill='#16232E' fontFamily='Microsoft YaHei'&gt;字符串、数值、布尔与类型转换&lt;/text&gt;&lt;text x='1080' y='184.0' fontSize='13' fill='#5A6B7A' textAnchor='end' fontFamily='Microsoft YaHei'&gt;W1&lt;/text&gt;&lt;rect x='0' y='254.0' width='1152' height='48.0' rx='7' fill='#FFFFFF' /&gt;&lt;text x='16' y='283.0' fontSize='15' fontWeight='bold' fill='#1F5FA8' fontFamily='Microsoft YaHei'&gt;第 8 节&lt;/text&gt;&lt;text x='96' y='283.0' fontSize='15' fill='#16232E' fontFamily='Microsoft YaHei'&gt;动手实战与答案讲评&lt;/text&gt;&lt;text x='1080' y='283.0' fontSize='13' fill='#5A6B7A' textAnchor='end' fontFamily='Microsoft YaHei'&gt;W1&lt;/text&gt;&lt;rect x='0' y='353.0' width='1152' height='48.0' rx='7' fill='#F2F7FD' /&gt;&lt;text x='16' y='382.0' fontSize='15' fontWeight='bold' fill='#1F5FA8' fontFamily='Microsoft YaHei'&gt;第 9 节&lt;/text&gt;&lt;text x='96' y='382.0' fontSize='15' fill='#16232E' fontFamily='Microsoft YaHei'&gt;单元 1 验收复盘&lt;/text&gt;&lt;text x='1080' y='382.0' fontSize='13' fill='#5A6B7A' textAnchor='end' fontFamily='Microsoft YaHei'&gt;W1&lt;/text&gt;&#13;&#10;        &lt;/svg&gt;&#13;&#10;    &lt;/Box&gt;&#13;&#10;    &lt;Box style={{ position: 'absolute', left: 64, bottom: 22, width: '1152px', flexDirection: 'row', justifyContent: 'space-between' }}&gt;&#13;&#10;        &lt;Text style={{ fontSize: 13, color: '#8A9AAA' }}&gt;Python 讲授课件 · 逐节版&lt;/Text&gt;&#13;&#10;        &lt;Text style={{ fontSize: 13, color: '#8A9AAA' }}&gt;单元 1 · 封面&lt;/Text&gt;&#13;&#10;    &lt;/Box&gt;&#13;&#10;&lt;/Slide&gt;&#13;&#10;"/>
         <p:cNvGrpSpPr/>
         <p:nvPr/>
       </p:nvGrpSpPr>
@@ -1657,7 +1657,7 @@
   <p:cSld>
     <p:spTree>
       <p:nvGrpSpPr>
-        <p:cNvPr id="29" name="" descr="&lt;Slide style={{ width: '1280px', height: '720px', backgroundColor: '#FAFCFE', padding: 0, position: 'relative', overflow: 'hidden' }}&gt;&#13;&#10;    &lt;Box style={{ position: 'absolute', left: 64, top: 36, width: '1152px', flexDirection: 'row', alignItems: 'center', gap: 12 }}&gt;&#13;&#10;        &lt;Box style={{ background: '#0E9B78', borderRadius: 5, padding: '3px 11px' }}&gt;&#13;&#10;            &lt;Text style={{ fontSize: 14, fontWeight: 'bold', color: '#FFFFFF' }}&gt;第 6 节&lt;/Text&gt;&#13;&#10;        &lt;/Box&gt;&#13;&#10;        &lt;Text style={{ fontSize: 30, fontWeight: 'bold', color: '#16232E' }}&gt;核心知识点&lt;/Text&gt;&#13;&#10;        &lt;Text style={{ fontSize: 15, color: '#5A6B7A', marginTop: 10 }}&gt;· 变量、命名与第一段文字&lt;/Text&gt;&#13;&#10;    &lt;/Box&gt;&#13;&#10;    &lt;Box style={{ position: 'absolute', left: 0, top: 0, width: '1280px', height: '720px' }}&gt;&#13;&#10;        &lt;svg width='1280' height='720' viewBox='0 0 1280 720'&gt;&#13;&#10;            &lt;rect x='64' y='96' width='368' height='330' rx='12' fill='#FFFFFF' stroke='#D8E3EE' /&gt;&lt;rect x='64' y='96' width='368' height='4' rx='2' fill='#1F5FA8' /&gt;&lt;text x='82' y='130' fontSize='15.5' fontWeight='bold' fill='#1F5FA8' textAnchor='start' fontFamily='Microsoft YaHei'&gt;2.1 变量：一个贴了标签的盒子&lt;/text&gt;&lt;text x='82' y='169.0' fontSize='13' fill='#3A4A58' textAnchor='start' fontFamily='Microsoft YaHei'&gt;· 变量不是&quot;存储数据的空间&quot;，更准确的说法是：&lt;/text&gt;&lt;text x='82' y='188.5' fontSize='13' fill='#3A4A58' textAnchor='start' fontFamily='Microsoft YaHei'&gt;一个指向某个数据的名字。&lt;/text&gt;&lt;rect x='468' y='96' width='368' height='330' rx='12' fill='#FFFFFF' stroke='#D8E3EE' /&gt;&lt;rect x='468' y='96' width='368' height='4' rx='2' fill='#1F5FA8' /&gt;&lt;text x='486' y='130' fontSize='15.5' fontWeight='bold' fill='#1F5FA8' textAnchor='start' fontFamily='Microsoft YaHei'&gt;2.2 命名规则：为什么 my-var 和 2var 不行&lt;/text&gt;&lt;text x='486' y='169.0' fontSize='13' fill='#3A4A58' textAnchor='start' fontFamily='Microsoft YaHei'&gt;· 好：user_name、total_price、item2&lt;/text&gt;&lt;text x='486' y='197.5' fontSize='13' fill='#3A4A58' textAnchor='start' fontFamily='Microsoft YaHei'&gt;· 差：UserName、userName、用户名&lt;/text&gt;&lt;rect x='872' y='96' width='368' height='330' rx='12' fill='#FFFFFF' stroke='#D8E3EE' /&gt;&lt;rect x='872' y='96' width='368' height='4' rx='2' fill='#1F5FA8' /&gt;&lt;text x='890' y='130' fontSize='15.5' fontWeight='bold' fill='#1F5FA8' textAnchor='start' fontFamily='Microsoft YaHei'&gt;2.3 字符串 str：带引号的文字&lt;/text&gt;&lt;text x='890' y='169.0' fontSize='13' fill='#3A4A58' textAnchor='start' fontFamily='Microsoft YaHei'&gt;· 不可变性&lt;/text&gt;&lt;rect x='64' y='574' width='1152' height='66' rx='12' fill='#EEF5FB' /&gt;&lt;text x='84' y='616' fontSize='14' fill='#243444' textAnchor='start' fontFamily='Microsoft YaHei'&gt;看不懂的地方先回讲义对应小节读一遍，再回来对着这页复述一次——能讲出来才算真懂。&lt;/text&gt;&#13;&#10;            &lt;text x='64' y='684' fontSize='13' fill='#8A9AAA' fontFamily='Microsoft YaHei'&gt;Python 讲授课件 · 逐节版&lt;/text&gt;&#13;&#10;            &lt;text x='1216' y='684' fontSize='13' fill='#8A9AAA' textAnchor='end' fontFamily='Microsoft YaHei'&gt;单元 1 · 第 6 节&lt;/text&gt;&#13;&#10;        &lt;/svg&gt;&#13;&#10;    &lt;/Box&gt;&#13;&#10;&lt;/Slide&gt;&#13;&#10;"/>
+        <p:cNvPr id="29" name="" descr="&lt;Slide style={{ width: '1280px', height: '720px', backgroundColor: '#FAFCFE', padding: 0, position: 'relative', overflow: 'hidden' }}&gt;&#13;&#10;    &lt;Box style={{ position: 'absolute', left: 64, top: 36, width: '1152px', flexDirection: 'row', alignItems: 'center', gap: 12 }}&gt;&#13;&#10;        &lt;Box style={{ background: '#0E9B78', borderRadius: 5, padding: '3px 11px' }}&gt;&#13;&#10;            &lt;Text style={{ fontSize: 14, fontWeight: 'bold', color: '#FFFFFF' }}&gt;第 6 节&lt;/Text&gt;&#13;&#10;        &lt;/Box&gt;&#13;&#10;        &lt;Text style={{ fontSize: 30, fontWeight: 'bold', color: '#16232E' }}&gt;核心知识点&lt;/Text&gt;&#13;&#10;        &lt;Text style={{ fontSize: 15, color: '#5A6B7A', marginTop: 10 }}&gt;· 变量、命名与第一段文字&lt;/Text&gt;&#13;&#10;    &lt;/Box&gt;&#13;&#10;    &lt;Box style={{ position: 'absolute', left: 0, top: 0, width: '1280px', height: '720px' }}&gt;&#13;&#10;        &lt;svg width='1280' height='720' viewBox='0 0 1280 720'&gt;&#13;&#10;            &lt;rect x='64' y='96' width='368' height='330' rx='12' fill='#FFFFFF' stroke='#D8E3EE' /&gt;&lt;rect x='64' y='96' width='368' height='4' rx='2' fill='#1F5FA8' /&gt;&lt;text x='82' y='130' fontSize='15.5' fontWeight='bold' fill='#1F5FA8' textAnchor='start' fontFamily='Microsoft YaHei'&gt;2.1 变量：一个贴了标签的盒子&lt;/text&gt;&lt;text x='82' y='169.0' fontSize='13' fill='#3A4A58' textAnchor='start' fontFamily='Microsoft YaHei'&gt;· 变量不是&quot;存储数据的空间&quot;，更准确的说法是：&lt;/text&gt;&lt;text x='82' y='188.5' fontSize='13' fill='#3A4A58' textAnchor='start' fontFamily='Microsoft YaHei'&gt;一个指向某个数据的名字。&lt;/text&gt;&lt;text x='82' y='217.0' fontSize='13' fill='#3A4A58' textAnchor='start' fontFamily='Microsoft YaHei'&gt;· Python 的重要特点：先赋值，后使用。&lt;/text&gt;&lt;rect x='468' y='96' width='368' height='330' rx='12' fill='#FFFFFF' stroke='#D8E3EE' /&gt;&lt;rect x='468' y='96' width='368' height='4' rx='2' fill='#1F5FA8' /&gt;&lt;text x='486' y='130' fontSize='15.5' fontWeight='bold' fill='#1F5FA8' textAnchor='start' fontFamily='Microsoft YaHei'&gt;2.2 命名规则：为什么 my-var 和 2var 不行&lt;/text&gt;&lt;text x='486' y='169.0' fontSize='13' fill='#3A4A58' textAnchor='start' fontFamily='Microsoft YaHei'&gt;· 好：user_name、total_price、item2&lt;/text&gt;&lt;text x='486' y='197.5' fontSize='13' fill='#3A4A58' textAnchor='start' fontFamily='Microsoft YaHei'&gt;· 差：UserName、userName、用户名&lt;/text&gt;&lt;rect x='872' y='96' width='368' height='330' rx='12' fill='#FFFFFF' stroke='#D8E3EE' /&gt;&lt;rect x='872' y='96' width='368' height='4' rx='2' fill='#1F5FA8' /&gt;&lt;text x='890' y='130' fontSize='15.5' fontWeight='bold' fill='#1F5FA8' textAnchor='start' fontFamily='Microsoft YaHei'&gt;2.3 字符串 str：带引号的文字&lt;/text&gt;&lt;text x='890' y='169.0' fontSize='13' fill='#3A4A58' textAnchor='start' fontFamily='Microsoft YaHei'&gt;· 不可变性&lt;/text&gt;&lt;rect x='64' y='574' width='1152' height='66' rx='12' fill='#EEF5FB' /&gt;&lt;text x='84' y='616' fontSize='14' fill='#243444' textAnchor='start' fontFamily='Microsoft YaHei'&gt;看不懂的地方先回讲义对应小节读一遍，再回来对着这页复述一次——能讲出来才算真懂。&lt;/text&gt;&#13;&#10;            &lt;text x='64' y='684' fontSize='13' fill='#8A9AAA' fontFamily='Microsoft YaHei'&gt;Python 讲授课件 · 逐节版&lt;/text&gt;&#13;&#10;            &lt;text x='1216' y='684' fontSize='13' fill='#8A9AAA' textAnchor='end' fontFamily='Microsoft YaHei'&gt;单元 1 · 第 6 节&lt;/text&gt;&#13;&#10;        &lt;/svg&gt;&#13;&#10;    &lt;/Box&gt;&#13;&#10;&lt;/Slide&gt;&#13;&#10;"/>
         <p:cNvGrpSpPr/>
         <p:nvPr/>
       </p:nvGrpSpPr>
@@ -2088,7 +2088,7 @@
   <p:cSld>
     <p:spTree>
       <p:nvGrpSpPr>
-        <p:cNvPr id="42" name="" descr="&lt;Slide style={{ width: '1280px', height: '720px', backgroundColor: '#FAFCFE', padding: 0, position: 'relative', overflow: 'hidden' }}&gt;&#13;&#10;    &lt;Box style={{ position: 'absolute', left: 64, top: 36, width: '1152px', flexDirection: 'row', alignItems: 'center', gap: 12 }}&gt;&#13;&#10;        &lt;Box style={{ background: '#0E9B78', borderRadius: 5, padding: '3px 11px' }}&gt;&#13;&#10;            &lt;Text style={{ fontSize: 14, fontWeight: 'bold', color: '#FFFFFF' }}&gt;第 7 节&lt;/Text&gt;&#13;&#10;        &lt;/Box&gt;&#13;&#10;        &lt;Text style={{ fontSize: 30, fontWeight: 'bold', color: '#16232E' }}&gt;核心知识点&lt;/Text&gt;&#13;&#10;        &lt;Text style={{ fontSize: 15, color: '#5A6B7A', marginTop: 10 }}&gt;· 字符串、数值、布尔与类型转换&lt;/Text&gt;&#13;&#10;    &lt;/Box&gt;&#13;&#10;    &lt;Box style={{ position: 'absolute', left: 0, top: 0, width: '1280px', height: '720px' }}&gt;&#13;&#10;        &lt;svg width='1280' height='720' viewBox='0 0 1280 720'&gt;&#13;&#10;            &lt;rect x='64' y='96' width='368' height='330' rx='12' fill='#FFFFFF' stroke='#D8E3EE' /&gt;&lt;rect x='64' y='96' width='368' height='4' rx='2' fill='#1F5FA8' /&gt;&lt;text x='82' y='130' fontSize='15.5' fontWeight='bold' fill='#1F5FA8' textAnchor='start' fontFamily='Microsoft YaHei'&gt;2.4 整数 int 与浮点数 float&lt;/text&gt;&lt;text x='82' y='169.0' fontSize='13' fill='#3A4A58' textAnchor='start' fontFamily='Microsoft YaHei'&gt;· int 是整数（-3、0、42），float 是小数（3.14、&lt;/text&gt;&lt;text x='82' y='188.5' fontSize='13' fill='#3A4A58' textAnchor='start' fontFamily='Microsoft YaHei'&gt;-0.5）。&lt;/text&gt;&lt;rect x='468' y='96' width='368' height='330' rx='12' fill='#FFFFFF' stroke='#D8E3EE' /&gt;&lt;rect x='468' y='96' width='368' height='4' rx='2' fill='#1F5FA8' /&gt;&lt;text x='486' y='130' fontSize='15.5' fontWeight='bold' fill='#1F5FA8' textAnchor='start' fontFamily='Microsoft YaHei'&gt;2.5 布尔值 bool：只有两个取值&lt;/text&gt;&lt;text x='486' y='169.0' fontSize='13' fill='#3A4A58' textAnchor='start' fontFamily='Microsoft YaHei'&gt;· 布尔值只有 True 和 False，首字母必须大写…&lt;/text&gt;&lt;rect x='872' y='96' width='368' height='330' rx='12' fill='#FFFFFF' stroke='#D8E3EE' /&gt;&lt;rect x='872' y='96' width='368' height='4' rx='2' fill='#1F5FA8' /&gt;&lt;text x='890' y='130' fontSize='15.5' fontWeight='bold' fill='#1F5FA8' textAnchor='start' fontFamily='Microsoft YaHei'&gt;2.6 类型转换：把一种类型的标签换成另一种&lt;/text&gt;&lt;text x='890' y='169.0' fontSize='13' fill='#3A4A58' textAnchor='start' fontFamily='Microsoft YaHei'&gt;· 转换可能失败&lt;/text&gt;&lt;text x='890' y='197.5' fontSize='13' fill='#3A4A58' textAnchor='start' fontFamily='Microsoft YaHei'&gt;· int(&quot;abc&quot;) → ValueError: invalid literal&lt;/text&gt;&lt;text x='890' y='217.0' fontSize='13' fill='#3A4A58' textAnchor='start' fontFamily='Microsoft YaHei'&gt;for int()（…&lt;/text&gt;&lt;text x='890' y='245.5' fontSize='13' fill='#3A4A58' textAnchor='start' fontFamily='Microsoft YaHei'&gt;· int(&quot;3.9&quot;) → ValueError（带小数点的字符串不能&lt;/text&gt;&lt;text x='890' y='265.0' fontSize='13' fill='#3A4A58' textAnchor='start' fontFamily='Microsoft YaHei'&gt;直接转整数…&lt;/text&gt;&lt;text x='64' y='470' fontSize='14.5' fontWeight='bold' fill='#0E9B78' textAnchor='start' fontFamily='Microsoft YaHei'&gt;本节的代码示例&lt;/text&gt;&lt;text x='64' y='500' fontSize='13' fill='#3A4A58' textAnchor='start' fontFamily='Microsoft YaHei'&gt;· 四种类型与 type()&lt;/text&gt;&lt;text x='468' y='500' fontSize='13' fill='#3A4A58' textAnchor='start' fontFamily='Microsoft YaHei'&gt;· 变量重新赋值与命名规范&lt;/text&gt;&lt;text x='872' y='500' fontSize='13' fill='#3A4A58' textAnchor='start' fontFamily='Microsoft YaHei'&gt;· 字符串常用方法&lt;/text&gt;&lt;rect x='64' y='574' width='1152' height='66' rx='12' fill='#EEF5FB' /&gt;&lt;text x='84' y='616' fontSize='14' fill='#243444' textAnchor='start' fontFamily='Microsoft YaHei'&gt;看不懂的地方先回讲义对应小节读一遍，再回来对着这页复述一次——能讲出来才算真懂。&lt;/text&gt;&#13;&#10;            &lt;text x='64' y='684' fontSize='13' fill='#8A9AAA' fontFamily='Microsoft YaHei'&gt;Python 讲授课件 · 逐节版&lt;/text&gt;&#13;&#10;            &lt;text x='1216' y='684' fontSize='13' fill='#8A9AAA' textAnchor='end' fontFamily='Microsoft YaHei'&gt;单元 1 · 第 7 节&lt;/text&gt;&#13;&#10;        &lt;/svg&gt;&#13;&#10;    &lt;/Box&gt;&#13;&#10;&lt;/Slide&gt;&#13;&#10;"/>
+        <p:cNvPr id="42" name="" descr="&lt;Slide style={{ width: '1280px', height: '720px', backgroundColor: '#FAFCFE', padding: 0, position: 'relative', overflow: 'hidden' }}&gt;&#13;&#10;    &lt;Box style={{ position: 'absolute', left: 64, top: 36, width: '1152px', flexDirection: 'row', alignItems: 'center', gap: 12 }}&gt;&#13;&#10;        &lt;Box style={{ background: '#0E9B78', borderRadius: 5, padding: '3px 11px' }}&gt;&#13;&#10;            &lt;Text style={{ fontSize: 14, fontWeight: 'bold', color: '#FFFFFF' }}&gt;第 7 节&lt;/Text&gt;&#13;&#10;        &lt;/Box&gt;&#13;&#10;        &lt;Text style={{ fontSize: 30, fontWeight: 'bold', color: '#16232E' }}&gt;核心知识点&lt;/Text&gt;&#13;&#10;        &lt;Text style={{ fontSize: 15, color: '#5A6B7A', marginTop: 10 }}&gt;· 字符串、数值、布尔与类型转换&lt;/Text&gt;&#13;&#10;    &lt;/Box&gt;&#13;&#10;    &lt;Box style={{ position: 'absolute', left: 0, top: 0, width: '1280px', height: '720px' }}&gt;&#13;&#10;        &lt;svg width='1280' height='720' viewBox='0 0 1280 720'&gt;&#13;&#10;            &lt;rect x='64' y='96' width='368' height='330' rx='12' fill='#FFFFFF' stroke='#D8E3EE' /&gt;&lt;rect x='64' y='96' width='368' height='4' rx='2' fill='#1F5FA8' /&gt;&lt;text x='82' y='130' fontSize='15.5' fontWeight='bold' fill='#1F5FA8' textAnchor='start' fontFamily='Microsoft YaHei'&gt;2.4 整数 int 与浮点数 float&lt;/text&gt;&lt;text x='82' y='169.0' fontSize='13' fill='#3A4A58' textAnchor='start' fontFamily='Microsoft YaHei'&gt;· int 是整数（-3、0、42），float 是小数（3.14、&lt;/text&gt;&lt;text x='82' y='188.5' fontSize='13' fill='#3A4A58' textAnchor='start' fontFamily='Microsoft YaHei'&gt;-0.5）。&lt;/text&gt;&lt;text x='82' y='217.0' fontSize='13' fill='#3A4A58' textAnchor='start' fontFamily='Microsoft YaHei'&gt;· round(数字, 位数) 的第二个参数表示保留几位小数。&lt;/text&gt;&lt;rect x='468' y='96' width='368' height='330' rx='12' fill='#FFFFFF' stroke='#D8E3EE' /&gt;&lt;rect x='468' y='96' width='368' height='4' rx='2' fill='#1F5FA8' /&gt;&lt;text x='486' y='130' fontSize='15.5' fontWeight='bold' fill='#1F5FA8' textAnchor='start' fontFamily='Microsoft YaHei'&gt;2.5 布尔值 bool：只有两个取值&lt;/text&gt;&lt;text x='486' y='169.0' fontSize='13' fill='#3A4A58' textAnchor='start' fontFamily='Microsoft YaHei'&gt;· 布尔值只有 True 和 False，首字母必须大写…&lt;/text&gt;&lt;text x='486' y='197.5' fontSize='13' fill='#3A4A58' textAnchor='start' fontFamily='Microsoft YaHei'&gt;· 问&quot;这个盒子里有东西吗？&lt;/text&gt;&lt;rect x='872' y='96' width='368' height='330' rx='12' fill='#FFFFFF' stroke='#D8E3EE' /&gt;&lt;rect x='872' y='96' width='368' height='4' rx='2' fill='#1F5FA8' /&gt;&lt;text x='890' y='130' fontSize='15.5' fontWeight='bold' fill='#1F5FA8' textAnchor='start' fontFamily='Microsoft YaHei'&gt;2.6 类型转换：把一种类型的标签换成另一种&lt;/text&gt;&lt;text x='890' y='169.0' fontSize='13' fill='#3A4A58' textAnchor='start' fontFamily='Microsoft YaHei'&gt;· 转换可能失败&lt;/text&gt;&lt;text x='890' y='197.5' fontSize='13' fill='#3A4A58' textAnchor='start' fontFamily='Microsoft YaHei'&gt;· int(&quot;abc&quot;) → ValueError: invalid literal&lt;/text&gt;&lt;text x='890' y='217.0' fontSize='13' fill='#3A4A58' textAnchor='start' fontFamily='Microsoft YaHei'&gt;for int()（…&lt;/text&gt;&lt;text x='890' y='245.5' fontSize='13' fill='#3A4A58' textAnchor='start' fontFamily='Microsoft YaHei'&gt;· int(&quot;3.9&quot;) → ValueError（带小数点的字符串不能&lt;/text&gt;&lt;text x='890' y='265.0' fontSize='13' fill='#3A4A58' textAnchor='start' fontFamily='Microsoft YaHei'&gt;直接转整数…&lt;/text&gt;&lt;text x='64' y='470' fontSize='14.5' fontWeight='bold' fill='#0E9B78' textAnchor='start' fontFamily='Microsoft YaHei'&gt;本节的代码示例&lt;/text&gt;&lt;text x='64' y='500' fontSize='13' fill='#3A4A58' textAnchor='start' fontFamily='Microsoft YaHei'&gt;· 四种类型与 type()&lt;/text&gt;&lt;text x='468' y='500' fontSize='13' fill='#3A4A58' textAnchor='start' fontFamily='Microsoft YaHei'&gt;· 变量重新赋值与命名规范&lt;/text&gt;&lt;text x='872' y='500' fontSize='13' fill='#3A4A58' textAnchor='start' fontFamily='Microsoft YaHei'&gt;· 字符串常用方法&lt;/text&gt;&lt;rect x='64' y='574' width='1152' height='66' rx='12' fill='#EEF5FB' /&gt;&lt;text x='84' y='616' fontSize='14' fill='#243444' textAnchor='start' fontFamily='Microsoft YaHei'&gt;看不懂的地方先回讲义对应小节读一遍，再回来对着这页复述一次——能讲出来才算真懂。&lt;/text&gt;&#13;&#10;            &lt;text x='64' y='684' fontSize='13' fill='#8A9AAA' fontFamily='Microsoft YaHei'&gt;Python 讲授课件 · 逐节版&lt;/text&gt;&#13;&#10;            &lt;text x='1216' y='684' fontSize='13' fill='#8A9AAA' textAnchor='end' fontFamily='Microsoft YaHei'&gt;单元 1 · 第 7 节&lt;/text&gt;&#13;&#10;        &lt;/svg&gt;&#13;&#10;    &lt;/Box&gt;&#13;&#10;&lt;/Slide&gt;&#13;&#10;"/>
         <p:cNvGrpSpPr/>
         <p:nvPr/>
       </p:nvGrpSpPr>
@@ -2519,7 +2519,7 @@
   <p:cSld>
     <p:spTree>
       <p:nvGrpSpPr>
-        <p:cNvPr id="55" name="" descr="&lt;Slide style={{ width: '1280px', height: '720px', backgroundColor: '#FAFCFE', padding: 0, position: 'relative', overflow: 'hidden' }}&gt;&#13;&#10;    &lt;Box style={{ position: 'absolute', left: 64, top: 36, width: '1152px', flexDirection: 'row', alignItems: 'center', gap: 12 }}&gt;&#13;&#10;        &lt;Box style={{ background: '#0E9B78', borderRadius: 5, padding: '3px 11px' }}&gt;&#13;&#10;            &lt;Text style={{ fontSize: 14, fontWeight: 'bold', color: '#FFFFFF' }}&gt;第 8 节&lt;/Text&gt;&#13;&#10;        &lt;/Box&gt;&#13;&#10;        &lt;Text style={{ fontSize: 30, fontWeight: 'bold', color: '#16232E' }}&gt;核心知识点&lt;/Text&gt;&#13;&#10;        &lt;Text style={{ fontSize: 15, color: '#5A6B7A', marginTop: 10 }}&gt;· 动手实战与答案讲评&lt;/Text&gt;&#13;&#10;    &lt;/Box&gt;&#13;&#10;    &lt;Box style={{ position: 'absolute', left: 0, top: 0, width: '1280px', height: '720px' }}&gt;&#13;&#10;        &lt;svg width='1280' height='720' viewBox='0 0 1280 720'&gt;&#13;&#10;            &lt;rect x='64' y='96' width='368' height='330' rx='12' fill='#FFFFFF' stroke='#D8E3EE' /&gt;&lt;rect x='64' y='96' width='368' height='4' rx='2' fill='#1F5FA8' /&gt;&lt;text x='82' y='130' fontSize='15.5' fontWeight='bold' fill='#1F5FA8' textAnchor='start' fontFamily='Microsoft YaHei'&gt;基础档&lt;/text&gt;&lt;text x='82' y='169.0' fontSize='13' fill='#3A4A58' textAnchor='start' fontFamily='Microsoft YaHei'&gt;· 练习 1-1【你的个人信息卡】&lt;/text&gt;&lt;text x='82' y='197.5' fontSize='13' fill='#3A4A58' textAnchor='start' fontFamily='Microsoft YaHei'&gt;· 练习 1-2【BMI 计算】&lt;/text&gt;&lt;text x='82' y='226.0' fontSize='13' fill='#3A4A58' textAnchor='start' fontFamily='Microsoft YaHei'&gt;· 练习 1-3【字符串方法接力】&lt;/text&gt;&lt;rect x='468' y='96' width='368' height='330' rx='12' fill='#FFFFFF' stroke='#D8E3EE' /&gt;&lt;rect x='468' y='96' width='368' height='4' rx='2' fill='#1F5FA8' /&gt;&lt;text x='486' y='130' fontSize='15.5' fontWeight='bold' fill='#1F5FA8' textAnchor='start' fontFamily='Microsoft YaHei'&gt;进阶档&lt;/text&gt;&lt;text x='486' y='169.0' fontSize='13' fill='#3A4A58' textAnchor='start' fontFamily='Microsoft YaHei'&gt;· 练习 1-5🌐【收银小票】&lt;/text&gt;&lt;text x='486' y='197.5' fontSize='13' fill='#3A4A58' textAnchor='start' fontFamily='Microsoft YaHei'&gt;· 练习 1-6【格式化对齐报表】&lt;/text&gt;&lt;text x='486' y='226.0' fontSize='13' fill='#3A4A58' textAnchor='start' fontFamily='Microsoft YaHei'&gt;· 练习 1-7【字符串拆解分析器】&lt;/text&gt;&lt;rect x='872' y='96' width='368' height='330' rx='12' fill='#FFFFFF' stroke='#D8E3EE' /&gt;&lt;rect x='872' y='96' width='368' height='4' rx='2' fill='#1F5FA8' /&gt;&lt;text x='890' y='130' fontSize='15.5' fontWeight='bold' fill='#1F5FA8' textAnchor='start' fontFamily='Microsoft YaHei'&gt;参考答案 1-1&lt;/text&gt;&lt;text x='890' y='169.0' fontSize='13' fill='#3A4A58' textAnchor='start' fontFamily='Microsoft YaHei'&gt;· name = &quot;小明&quot; # str 类型&lt;/text&gt;&lt;rect x='64' y='574' width='1152' height='66' rx='12' fill='#EEF5FB' /&gt;&lt;text x='84' y='616' fontSize='14' fill='#243444' textAnchor='start' fontFamily='Microsoft YaHei'&gt;看不懂的地方先回讲义对应小节读一遍，再回来对着这页复述一次——能讲出来才算真懂。&lt;/text&gt;&#13;&#10;            &lt;text x='64' y='684' fontSize='13' fill='#8A9AAA' fontFamily='Microsoft YaHei'&gt;Python 讲授课件 · 逐节版&lt;/text&gt;&#13;&#10;            &lt;text x='1216' y='684' fontSize='13' fill='#8A9AAA' textAnchor='end' fontFamily='Microsoft YaHei'&gt;单元 1 · 第 8 节&lt;/text&gt;&#13;&#10;        &lt;/svg&gt;&#13;&#10;    &lt;/Box&gt;&#13;&#10;&lt;/Slide&gt;&#13;&#10;"/>
+        <p:cNvPr id="55" name="" descr="&lt;Slide style={{ width: '1280px', height: '720px', backgroundColor: '#FAFCFE', padding: 0, position: 'relative', overflow: 'hidden' }}&gt;&#13;&#10;    &lt;Box style={{ position: 'absolute', left: 64, top: 36, width: '1152px', flexDirection: 'row', alignItems: 'center', gap: 12 }}&gt;&#13;&#10;        &lt;Box style={{ background: '#0E9B78', borderRadius: 5, padding: '3px 11px' }}&gt;&#13;&#10;            &lt;Text style={{ fontSize: 14, fontWeight: 'bold', color: '#FFFFFF' }}&gt;第 8 节&lt;/Text&gt;&#13;&#10;        &lt;/Box&gt;&#13;&#10;        &lt;Text style={{ fontSize: 30, fontWeight: 'bold', color: '#16232E' }}&gt;核心知识点&lt;/Text&gt;&#13;&#10;        &lt;Text style={{ fontSize: 15, color: '#5A6B7A', marginTop: 10 }}&gt;· 动手实战与答案讲评&lt;/Text&gt;&#13;&#10;    &lt;/Box&gt;&#13;&#10;    &lt;Box style={{ position: 'absolute', left: 0, top: 0, width: '1280px', height: '720px' }}&gt;&#13;&#10;        &lt;svg width='1280' height='720' viewBox='0 0 1280 720'&gt;&#13;&#10;            &lt;rect x='64' y='96' width='368' height='330' rx='12' fill='#FFFFFF' stroke='#D8E3EE' /&gt;&lt;rect x='64' y='96' width='368' height='4' rx='2' fill='#1F5FA8' /&gt;&lt;text x='82' y='130' fontSize='15.5' fontWeight='bold' fill='#1F5FA8' textAnchor='start' fontFamily='Microsoft YaHei'&gt;基础档&lt;/text&gt;&lt;text x='82' y='169.0' fontSize='13' fill='#3A4A58' textAnchor='start' fontFamily='Microsoft YaHei'&gt;· 练习 1-1【你的个人信息卡】&lt;/text&gt;&lt;text x='82' y='197.5' fontSize='13' fill='#3A4A58' textAnchor='start' fontFamily='Microsoft YaHei'&gt;· 练习 1-2【BMI 计算】&lt;/text&gt;&lt;text x='82' y='226.0' fontSize='13' fill='#3A4A58' textAnchor='start' fontFamily='Microsoft YaHei'&gt;· 练习 1-3【字符串方法接力】&lt;/text&gt;&lt;rect x='468' y='96' width='368' height='330' rx='12' fill='#FFFFFF' stroke='#D8E3EE' /&gt;&lt;rect x='468' y='96' width='368' height='4' rx='2' fill='#1F5FA8' /&gt;&lt;text x='486' y='130' fontSize='15.5' fontWeight='bold' fill='#1F5FA8' textAnchor='start' fontFamily='Microsoft YaHei'&gt;进阶档&lt;/text&gt;&lt;text x='486' y='169.0' fontSize='13' fill='#3A4A58' textAnchor='start' fontFamily='Microsoft YaHei'&gt;· 练习 1-5🌐【收银小票】&lt;/text&gt;&lt;text x='486' y='197.5' fontSize='13' fill='#3A4A58' textAnchor='start' fontFamily='Microsoft YaHei'&gt;· 练习 1-6【格式化对齐报表】&lt;/text&gt;&lt;text x='486' y='226.0' fontSize='13' fill='#3A4A58' textAnchor='start' fontFamily='Microsoft YaHei'&gt;· 练习 1-7【字符串拆解分析器】&lt;/text&gt;&lt;rect x='872' y='96' width='368' height='330' rx='12' fill='#FFFFFF' stroke='#D8E3EE' /&gt;&lt;rect x='872' y='96' width='368' height='4' rx='2' fill='#1F5FA8' /&gt;&lt;text x='890' y='130' fontSize='15.5' fontWeight='bold' fill='#1F5FA8' textAnchor='start' fontFamily='Microsoft YaHei'&gt;参考答案 1-9&lt;/text&gt;&lt;text x='890' y='169.0' fontSize='13' fill='#3A4A58' textAnchor='start' fontFamily='Microsoft YaHei'&gt;· 两种写法都能去掉后缀，各有适用场景：&lt;/text&gt;&lt;text x='890' y='188.5' fontSize='13' fill='#3A4A58' textAnchor='start' fontFamily='Microsoft YaHei'&gt;removesuffix(&quot;.csv&quot;).removesuffix…&lt;/text&gt;&lt;rect x='64' y='574' width='1152' height='66' rx='12' fill='#EEF5FB' /&gt;&lt;text x='84' y='616' fontSize='14' fill='#243444' textAnchor='start' fontFamily='Microsoft YaHei'&gt;看不懂的地方先回讲义对应小节读一遍，再回来对着这页复述一次——能讲出来才算真懂。&lt;/text&gt;&#13;&#10;            &lt;text x='64' y='684' fontSize='13' fill='#8A9AAA' fontFamily='Microsoft YaHei'&gt;Python 讲授课件 · 逐节版&lt;/text&gt;&#13;&#10;            &lt;text x='1216' y='684' fontSize='13' fill='#8A9AAA' textAnchor='end' fontFamily='Microsoft YaHei'&gt;单元 1 · 第 8 节&lt;/text&gt;&#13;&#10;        &lt;/svg&gt;&#13;&#10;    &lt;/Box&gt;&#13;&#10;&lt;/Slide&gt;&#13;&#10;"/>
         <p:cNvGrpSpPr/>
         <p:nvPr/>
       </p:nvGrpSpPr>

--- a/python-course-ppt/逐节课件/Python讲授课件-单元01.pptx
+++ b/python-course-ppt/逐节课件/Python讲授课件-单元01.pptx
@@ -234,6 +234,1050 @@
     </a:lvl9pPr>
   </p:notesStyle>
 </p:notesMaster>
+</file>
+
+<file path=ppt/notesSlides/notesSlide1.xml><?xml version="1.0" encoding="utf-8"?>
+<p:notes xmlns:a="http://schemas.openxmlformats.org/drawingml/2006/main" xmlns:p="http://schemas.openxmlformats.org/presentationml/2006/main" xmlns:r="http://schemas.openxmlformats.org/officeDocument/2006/relationships">
+  <p:cSld>
+    <p:spTree>
+      <p:nvGrpSpPr>
+        <p:cNvPr id="1" name=""/>
+        <p:cNvGrpSpPr/>
+        <p:nvPr/>
+      </p:nvGrpSpPr>
+      <p:grpSpPr>
+        <a:xfrm>
+          <a:off x="0" y="0"/>
+          <a:ext cx="0" cy="0"/>
+          <a:chOff x="0" y="0"/>
+          <a:chExt cx="0" cy="0"/>
+        </a:xfrm>
+      </p:grpSpPr>
+      <p:sp>
+        <p:nvSpPr>
+          <p:cNvPr id="2" name="讲课提示"/>
+          <p:cNvSpPr txBox="1"/>
+          <p:nvPr/>
+        </p:nvSpPr>
+        <p:spPr>
+          <a:xfrm>
+            <a:off x="457200" y="457200"/>
+            <a:ext cx="6858000" cy="4800600"/>
+          </a:xfrm>
+          <a:prstGeom prst="rect">
+            <a:avLst/>
+          </a:prstGeom>
+        </p:spPr>
+        <p:txBody>
+          <a:bodyPr wrap="square"/>
+          <a:lstStyle/>
+          <a:p>
+            <a:r>
+              <a:rPr lang="zh-CN" dirty="0"/>
+              <a:t>单元 1 · 单元 1 · 变量与简单数据类型</a:t>
+            </a:r>
+          </a:p>
+          <a:p>
+            <a:r>
+              <a:rPr lang="zh-CN" dirty="0"/>
+              <a:t/>
+            </a:r>
+          </a:p>
+          <a:p>
+            <a:r>
+              <a:rPr lang="zh-CN" dirty="0"/>
+              <a:t>本单元包含以下课节：</a:t>
+            </a:r>
+          </a:p>
+          <a:p>
+            <a:r>
+              <a:rPr lang="zh-CN" dirty="0"/>
+              <a:t>· 第 6 节 变量、命名与第一段文字</a:t>
+            </a:r>
+          </a:p>
+          <a:p>
+            <a:r>
+              <a:rPr lang="zh-CN" dirty="0"/>
+              <a:t>· 第 7 节 字符串、数值、布尔与类型转换</a:t>
+            </a:r>
+          </a:p>
+          <a:p>
+            <a:r>
+              <a:rPr lang="zh-CN" dirty="0"/>
+              <a:t>· 第 8 节 动手实战与答案讲评</a:t>
+            </a:r>
+          </a:p>
+          <a:p>
+            <a:r>
+              <a:rPr lang="zh-CN" dirty="0"/>
+              <a:t>· 第 9 节 单元 1 验收复盘</a:t>
+            </a:r>
+          </a:p>
+          <a:p>
+            <a:r>
+              <a:rPr lang="zh-CN" dirty="0"/>
+              <a:t/>
+            </a:r>
+          </a:p>
+          <a:p>
+            <a:r>
+              <a:rPr lang="zh-CN" dirty="0"/>
+              <a:t>开场用 3 分钟讲清：这个单元学完能做出什么，最后会被关卡怎么验。</a:t>
+            </a:r>
+          </a:p>
+        </p:txBody>
+      </p:sp>
+    </p:spTree>
+  </p:cSld>
+  <p:clrMapOvr>
+    <a:masterClrMapping/>
+  </p:clrMapOvr>
+</p:notes>
+</file>
+
+<file path=ppt/notesSlides/notesSlide10.xml><?xml version="1.0" encoding="utf-8"?>
+<p:notes xmlns:a="http://schemas.openxmlformats.org/drawingml/2006/main" xmlns:p="http://schemas.openxmlformats.org/presentationml/2006/main" xmlns:r="http://schemas.openxmlformats.org/officeDocument/2006/relationships">
+  <p:cSld>
+    <p:spTree>
+      <p:nvGrpSpPr>
+        <p:cNvPr id="1" name=""/>
+        <p:cNvGrpSpPr/>
+        <p:nvPr/>
+      </p:nvGrpSpPr>
+      <p:grpSpPr>
+        <a:xfrm>
+          <a:off x="0" y="0"/>
+          <a:ext cx="0" cy="0"/>
+          <a:chOff x="0" y="0"/>
+          <a:chExt cx="0" cy="0"/>
+        </a:xfrm>
+      </p:grpSpPr>
+      <p:sp>
+        <p:nvSpPr>
+          <p:cNvPr id="2" name="讲课提示"/>
+          <p:cNvSpPr txBox="1"/>
+          <p:nvPr/>
+        </p:nvSpPr>
+        <p:spPr>
+          <a:xfrm>
+            <a:off x="457200" y="457200"/>
+            <a:ext cx="6858000" cy="4800600"/>
+          </a:xfrm>
+          <a:prstGeom prst="rect">
+            <a:avLst/>
+          </a:prstGeom>
+        </p:spPr>
+        <p:txBody>
+          <a:bodyPr wrap="square"/>
+          <a:lstStyle/>
+          <a:p>
+            <a:r>
+              <a:rPr lang="zh-CN" dirty="0"/>
+              <a:t>单元 1 小结 · 单元 1 · 小结</a:t>
+            </a:r>
+          </a:p>
+          <a:p>
+            <a:r>
+              <a:rPr lang="zh-CN" dirty="0"/>
+              <a:t/>
+            </a:r>
+          </a:p>
+          <a:p>
+            <a:r>
+              <a:rPr lang="zh-CN" dirty="0"/>
+              <a:t>收尾动作：让学生合上讲义，口述本单元三个最重要的结论；说不出来的，回对应课节。</a:t>
+            </a:r>
+          </a:p>
+          <a:p>
+            <a:r>
+              <a:rPr lang="zh-CN" dirty="0"/>
+              <a:t>然后当场勾一遍本单元课节的「已完成」，没打勾的进下一单元前补掉。</a:t>
+            </a:r>
+          </a:p>
+        </p:txBody>
+      </p:sp>
+    </p:spTree>
+  </p:cSld>
+  <p:clrMapOvr>
+    <a:masterClrMapping/>
+  </p:clrMapOvr>
+</p:notes>
+</file>
+
+<file path=ppt/notesSlides/notesSlide2.xml><?xml version="1.0" encoding="utf-8"?>
+<p:notes xmlns:a="http://schemas.openxmlformats.org/drawingml/2006/main" xmlns:p="http://schemas.openxmlformats.org/presentationml/2006/main" xmlns:r="http://schemas.openxmlformats.org/officeDocument/2006/relationships">
+  <p:cSld>
+    <p:spTree>
+      <p:nvGrpSpPr>
+        <p:cNvPr id="1" name=""/>
+        <p:cNvGrpSpPr/>
+        <p:nvPr/>
+      </p:nvGrpSpPr>
+      <p:grpSpPr>
+        <a:xfrm>
+          <a:off x="0" y="0"/>
+          <a:ext cx="0" cy="0"/>
+          <a:chOff x="0" y="0"/>
+          <a:chExt cx="0" cy="0"/>
+        </a:xfrm>
+      </p:grpSpPr>
+      <p:sp>
+        <p:nvSpPr>
+          <p:cNvPr id="2" name="讲课提示"/>
+          <p:cNvSpPr txBox="1"/>
+          <p:nvPr/>
+        </p:nvSpPr>
+        <p:spPr>
+          <a:xfrm>
+            <a:off x="457200" y="457200"/>
+            <a:ext cx="6858000" cy="4800600"/>
+          </a:xfrm>
+          <a:prstGeom prst="rect">
+            <a:avLst/>
+          </a:prstGeom>
+        </p:spPr>
+        <p:txBody>
+          <a:bodyPr wrap="square"/>
+          <a:lstStyle/>
+          <a:p>
+            <a:r>
+              <a:rPr lang="zh-CN" dirty="0"/>
+              <a:t>第 6 节 · 变量、命名与第一段文字</a:t>
+            </a:r>
+          </a:p>
+          <a:p>
+            <a:r>
+              <a:rPr lang="zh-CN" dirty="0"/>
+              <a:t>单元 1 · 变量与简单数据类型 · W1</a:t>
+            </a:r>
+          </a:p>
+          <a:p>
+            <a:r>
+              <a:rPr lang="zh-CN" dirty="0"/>
+              <a:t/>
+            </a:r>
+          </a:p>
+          <a:p>
+            <a:r>
+              <a:rPr lang="zh-CN" dirty="0"/>
+              <a:t>学习目标：能写出符合 PEP 8 的变量名，理解「变量是贴了标签的盒子」</a:t>
+            </a:r>
+          </a:p>
+          <a:p>
+            <a:r>
+              <a:rPr lang="zh-CN" dirty="0"/>
+              <a:t/>
+            </a:r>
+          </a:p>
+          <a:p>
+            <a:r>
+              <a:rPr lang="zh-CN" dirty="0"/>
+              <a:t>课堂实操（40 分钟，不看答案）：</a:t>
+            </a:r>
+          </a:p>
+          <a:p>
+            <a:r>
+              <a:rPr lang="zh-CN" dirty="0"/>
+              <a:t>· 现场判断 10 个变量名哪些合法</a:t>
+            </a:r>
+          </a:p>
+          <a:p>
+            <a:r>
+              <a:rPr lang="zh-CN" dirty="0"/>
+              <a:t>· 把标签换三次，观察变量重新赋值</a:t>
+            </a:r>
+          </a:p>
+          <a:p>
+            <a:r>
+              <a:rPr lang="zh-CN" dirty="0"/>
+              <a:t/>
+            </a:r>
+          </a:p>
+          <a:p>
+            <a:r>
+              <a:rPr lang="zh-CN" dirty="0"/>
+              <a:t>课后作业：</a:t>
+            </a:r>
+          </a:p>
+          <a:p>
+            <a:r>
+              <a:rPr lang="zh-CN" dirty="0"/>
+              <a:t>· 完成动手练习 1-1 ~ 1-2</a:t>
+            </a:r>
+          </a:p>
+          <a:p>
+            <a:r>
+              <a:rPr lang="zh-CN" dirty="0"/>
+              <a:t/>
+            </a:r>
+          </a:p>
+          <a:p>
+            <a:r>
+              <a:rPr lang="zh-CN" dirty="0"/>
+              <a:t>节奏：讲 20 分钟 → 学员自己敲 40 分钟（不看答案）→ 对讲评自查 20 分钟 → 写作业 10 分钟。</a:t>
+            </a:r>
+          </a:p>
+        </p:txBody>
+      </p:sp>
+    </p:spTree>
+  </p:cSld>
+  <p:clrMapOvr>
+    <a:masterClrMapping/>
+  </p:clrMapOvr>
+</p:notes>
+</file>
+
+<file path=ppt/notesSlides/notesSlide3.xml><?xml version="1.0" encoding="utf-8"?>
+<p:notes xmlns:a="http://schemas.openxmlformats.org/drawingml/2006/main" xmlns:p="http://schemas.openxmlformats.org/presentationml/2006/main" xmlns:r="http://schemas.openxmlformats.org/officeDocument/2006/relationships">
+  <p:cSld>
+    <p:spTree>
+      <p:nvGrpSpPr>
+        <p:cNvPr id="1" name=""/>
+        <p:cNvGrpSpPr/>
+        <p:nvPr/>
+      </p:nvGrpSpPr>
+      <p:grpSpPr>
+        <a:xfrm>
+          <a:off x="0" y="0"/>
+          <a:ext cx="0" cy="0"/>
+          <a:chOff x="0" y="0"/>
+          <a:chExt cx="0" cy="0"/>
+        </a:xfrm>
+      </p:grpSpPr>
+      <p:sp>
+        <p:nvSpPr>
+          <p:cNvPr id="2" name="讲课提示"/>
+          <p:cNvSpPr txBox="1"/>
+          <p:nvPr/>
+        </p:nvSpPr>
+        <p:spPr>
+          <a:xfrm>
+            <a:off x="457200" y="457200"/>
+            <a:ext cx="6858000" cy="4800600"/>
+          </a:xfrm>
+          <a:prstGeom prst="rect">
+            <a:avLst/>
+          </a:prstGeom>
+        </p:spPr>
+        <p:txBody>
+          <a:bodyPr wrap="square"/>
+          <a:lstStyle/>
+          <a:p>
+            <a:r>
+              <a:rPr lang="zh-CN" dirty="0"/>
+              <a:t>第 6 节 · 核心知识点：变量、命名与第一段文字</a:t>
+            </a:r>
+          </a:p>
+          <a:p>
+            <a:r>
+              <a:rPr lang="zh-CN" dirty="0"/>
+              <a:t/>
+            </a:r>
+          </a:p>
+          <a:p>
+            <a:r>
+              <a:rPr lang="zh-CN" dirty="0"/>
+              <a:t>讲这一页时：先让学生说出上节课的结论，再逐块讲要点。</a:t>
+            </a:r>
+          </a:p>
+          <a:p>
+            <a:r>
+              <a:rPr lang="zh-CN" dirty="0"/>
+              <a:t>每讲完一块，问一句「这一步如果写错了，报错会长什么样？」——把错误提前讲。</a:t>
+            </a:r>
+          </a:p>
+          <a:p>
+            <a:r>
+              <a:rPr lang="zh-CN" dirty="0"/>
+              <a:t/>
+            </a:r>
+          </a:p>
+          <a:p>
+            <a:r>
+              <a:rPr lang="zh-CN" dirty="0"/>
+              <a:t>本节目标：能写出符合 PEP 8 的变量名，理解「变量是贴了标签的盒子」</a:t>
+            </a:r>
+          </a:p>
+          <a:p>
+            <a:r>
+              <a:rPr lang="zh-CN" dirty="0"/>
+              <a:t/>
+            </a:r>
+          </a:p>
+          <a:p>
+            <a:r>
+              <a:rPr lang="zh-CN" dirty="0"/>
+              <a:t>看不到懂的地方，回讲义对应小节读一遍，再回来对着这页复述一次——能讲出来才算真懂。</a:t>
+            </a:r>
+          </a:p>
+        </p:txBody>
+      </p:sp>
+    </p:spTree>
+  </p:cSld>
+  <p:clrMapOvr>
+    <a:masterClrMapping/>
+  </p:clrMapOvr>
+</p:notes>
+</file>
+
+<file path=ppt/notesSlides/notesSlide4.xml><?xml version="1.0" encoding="utf-8"?>
+<p:notes xmlns:a="http://schemas.openxmlformats.org/drawingml/2006/main" xmlns:p="http://schemas.openxmlformats.org/presentationml/2006/main" xmlns:r="http://schemas.openxmlformats.org/officeDocument/2006/relationships">
+  <p:cSld>
+    <p:spTree>
+      <p:nvGrpSpPr>
+        <p:cNvPr id="1" name=""/>
+        <p:cNvGrpSpPr/>
+        <p:nvPr/>
+      </p:nvGrpSpPr>
+      <p:grpSpPr>
+        <a:xfrm>
+          <a:off x="0" y="0"/>
+          <a:ext cx="0" cy="0"/>
+          <a:chOff x="0" y="0"/>
+          <a:chExt cx="0" cy="0"/>
+        </a:xfrm>
+      </p:grpSpPr>
+      <p:sp>
+        <p:nvSpPr>
+          <p:cNvPr id="2" name="讲课提示"/>
+          <p:cNvSpPr txBox="1"/>
+          <p:nvPr/>
+        </p:nvSpPr>
+        <p:spPr>
+          <a:xfrm>
+            <a:off x="457200" y="457200"/>
+            <a:ext cx="6858000" cy="4800600"/>
+          </a:xfrm>
+          <a:prstGeom prst="rect">
+            <a:avLst/>
+          </a:prstGeom>
+        </p:spPr>
+        <p:txBody>
+          <a:bodyPr wrap="square"/>
+          <a:lstStyle/>
+          <a:p>
+            <a:r>
+              <a:rPr lang="zh-CN" dirty="0"/>
+              <a:t>第 7 节 · 字符串、数值、布尔与类型转换</a:t>
+            </a:r>
+          </a:p>
+          <a:p>
+            <a:r>
+              <a:rPr lang="zh-CN" dirty="0"/>
+              <a:t>单元 1 · 变量与简单数据类型 · W1</a:t>
+            </a:r>
+          </a:p>
+          <a:p>
+            <a:r>
+              <a:rPr lang="zh-CN" dirty="0"/>
+              <a:t/>
+            </a:r>
+          </a:p>
+          <a:p>
+            <a:r>
+              <a:rPr lang="zh-CN" dirty="0"/>
+              <a:t>学习目标：熟练使用 str 方法与四则运算，掌握 int / float / bool 转换规则</a:t>
+            </a:r>
+          </a:p>
+          <a:p>
+            <a:r>
+              <a:rPr lang="zh-CN" dirty="0"/>
+              <a:t/>
+            </a:r>
+          </a:p>
+          <a:p>
+            <a:r>
+              <a:rPr lang="zh-CN" dirty="0"/>
+              <a:t>课堂实操（40 分钟，不看答案）：</a:t>
+            </a:r>
+          </a:p>
+          <a:p>
+            <a:r>
+              <a:rPr lang="zh-CN" dirty="0"/>
+              <a:t>· 对同一字符串连续调用三种方法并打印每步结果</a:t>
+            </a:r>
+          </a:p>
+          <a:p>
+            <a:r>
+              <a:rPr lang="zh-CN" dirty="0"/>
+              <a:t>· 现场预测 5 个类型转换结果再验证</a:t>
+            </a:r>
+          </a:p>
+          <a:p>
+            <a:r>
+              <a:rPr lang="zh-CN" dirty="0"/>
+              <a:t>· 解释 int("3.9") 为什么会报错</a:t>
+            </a:r>
+          </a:p>
+          <a:p>
+            <a:r>
+              <a:rPr lang="zh-CN" dirty="0"/>
+              <a:t/>
+            </a:r>
+          </a:p>
+          <a:p>
+            <a:r>
+              <a:rPr lang="zh-CN" dirty="0"/>
+              <a:t>课后作业：</a:t>
+            </a:r>
+          </a:p>
+          <a:p>
+            <a:r>
+              <a:rPr lang="zh-CN" dirty="0"/>
+              <a:t>· 完成动手练习 1-3 ~ 1-4</a:t>
+            </a:r>
+          </a:p>
+          <a:p>
+            <a:r>
+              <a:rPr lang="zh-CN" dirty="0"/>
+              <a:t/>
+            </a:r>
+          </a:p>
+          <a:p>
+            <a:r>
+              <a:rPr lang="zh-CN" dirty="0"/>
+              <a:t>节奏：讲 20 分钟 → 学员自己敲 40 分钟（不看答案）→ 对讲评自查 20 分钟 → 写作业 10 分钟。</a:t>
+            </a:r>
+          </a:p>
+        </p:txBody>
+      </p:sp>
+    </p:spTree>
+  </p:cSld>
+  <p:clrMapOvr>
+    <a:masterClrMapping/>
+  </p:clrMapOvr>
+</p:notes>
+</file>
+
+<file path=ppt/notesSlides/notesSlide5.xml><?xml version="1.0" encoding="utf-8"?>
+<p:notes xmlns:a="http://schemas.openxmlformats.org/drawingml/2006/main" xmlns:p="http://schemas.openxmlformats.org/presentationml/2006/main" xmlns:r="http://schemas.openxmlformats.org/officeDocument/2006/relationships">
+  <p:cSld>
+    <p:spTree>
+      <p:nvGrpSpPr>
+        <p:cNvPr id="1" name=""/>
+        <p:cNvGrpSpPr/>
+        <p:nvPr/>
+      </p:nvGrpSpPr>
+      <p:grpSpPr>
+        <a:xfrm>
+          <a:off x="0" y="0"/>
+          <a:ext cx="0" cy="0"/>
+          <a:chOff x="0" y="0"/>
+          <a:chExt cx="0" cy="0"/>
+        </a:xfrm>
+      </p:grpSpPr>
+      <p:sp>
+        <p:nvSpPr>
+          <p:cNvPr id="2" name="讲课提示"/>
+          <p:cNvSpPr txBox="1"/>
+          <p:nvPr/>
+        </p:nvSpPr>
+        <p:spPr>
+          <a:xfrm>
+            <a:off x="457200" y="457200"/>
+            <a:ext cx="6858000" cy="4800600"/>
+          </a:xfrm>
+          <a:prstGeom prst="rect">
+            <a:avLst/>
+          </a:prstGeom>
+        </p:spPr>
+        <p:txBody>
+          <a:bodyPr wrap="square"/>
+          <a:lstStyle/>
+          <a:p>
+            <a:r>
+              <a:rPr lang="zh-CN" dirty="0"/>
+              <a:t>第 7 节 · 核心知识点：字符串、数值、布尔与类型转换</a:t>
+            </a:r>
+          </a:p>
+          <a:p>
+            <a:r>
+              <a:rPr lang="zh-CN" dirty="0"/>
+              <a:t/>
+            </a:r>
+          </a:p>
+          <a:p>
+            <a:r>
+              <a:rPr lang="zh-CN" dirty="0"/>
+              <a:t>讲这一页时：先让学生说出上节课的结论，再逐块讲要点。</a:t>
+            </a:r>
+          </a:p>
+          <a:p>
+            <a:r>
+              <a:rPr lang="zh-CN" dirty="0"/>
+              <a:t>每讲完一块，问一句「这一步如果写错了，报错会长什么样？」——把错误提前讲。</a:t>
+            </a:r>
+          </a:p>
+          <a:p>
+            <a:r>
+              <a:rPr lang="zh-CN" dirty="0"/>
+              <a:t/>
+            </a:r>
+          </a:p>
+          <a:p>
+            <a:r>
+              <a:rPr lang="zh-CN" dirty="0"/>
+              <a:t>本节目标：熟练使用 str 方法与四则运算，掌握 int / float / bool 转换规则</a:t>
+            </a:r>
+          </a:p>
+          <a:p>
+            <a:r>
+              <a:rPr lang="zh-CN" dirty="0"/>
+              <a:t/>
+            </a:r>
+          </a:p>
+          <a:p>
+            <a:r>
+              <a:rPr lang="zh-CN" dirty="0"/>
+              <a:t>看不到懂的地方，回讲义对应小节读一遍，再回来对着这页复述一次——能讲出来才算真懂。</a:t>
+            </a:r>
+          </a:p>
+        </p:txBody>
+      </p:sp>
+    </p:spTree>
+  </p:cSld>
+  <p:clrMapOvr>
+    <a:masterClrMapping/>
+  </p:clrMapOvr>
+</p:notes>
+</file>
+
+<file path=ppt/notesSlides/notesSlide6.xml><?xml version="1.0" encoding="utf-8"?>
+<p:notes xmlns:a="http://schemas.openxmlformats.org/drawingml/2006/main" xmlns:p="http://schemas.openxmlformats.org/presentationml/2006/main" xmlns:r="http://schemas.openxmlformats.org/officeDocument/2006/relationships">
+  <p:cSld>
+    <p:spTree>
+      <p:nvGrpSpPr>
+        <p:cNvPr id="1" name=""/>
+        <p:cNvGrpSpPr/>
+        <p:nvPr/>
+      </p:nvGrpSpPr>
+      <p:grpSpPr>
+        <a:xfrm>
+          <a:off x="0" y="0"/>
+          <a:ext cx="0" cy="0"/>
+          <a:chOff x="0" y="0"/>
+          <a:chExt cx="0" cy="0"/>
+        </a:xfrm>
+      </p:grpSpPr>
+      <p:sp>
+        <p:nvSpPr>
+          <p:cNvPr id="2" name="讲课提示"/>
+          <p:cNvSpPr txBox="1"/>
+          <p:nvPr/>
+        </p:nvSpPr>
+        <p:spPr>
+          <a:xfrm>
+            <a:off x="457200" y="457200"/>
+            <a:ext cx="6858000" cy="4800600"/>
+          </a:xfrm>
+          <a:prstGeom prst="rect">
+            <a:avLst/>
+          </a:prstGeom>
+        </p:spPr>
+        <p:txBody>
+          <a:bodyPr wrap="square"/>
+          <a:lstStyle/>
+          <a:p>
+            <a:r>
+              <a:rPr lang="zh-CN" dirty="0"/>
+              <a:t>第 8 节 · 动手实战与答案讲评</a:t>
+            </a:r>
+          </a:p>
+          <a:p>
+            <a:r>
+              <a:rPr lang="zh-CN" dirty="0"/>
+              <a:t>单元 1 · 变量与简单数据类型 · W1</a:t>
+            </a:r>
+          </a:p>
+          <a:p>
+            <a:r>
+              <a:rPr lang="zh-CN" dirty="0"/>
+              <a:t/>
+            </a:r>
+          </a:p>
+          <a:p>
+            <a:r>
+              <a:rPr lang="zh-CN" dirty="0"/>
+              <a:t>学习目标：独立完成单元 1 练习，能解释类型转换的报错原因</a:t>
+            </a:r>
+          </a:p>
+          <a:p>
+            <a:r>
+              <a:rPr lang="zh-CN" dirty="0"/>
+              <a:t/>
+            </a:r>
+          </a:p>
+          <a:p>
+            <a:r>
+              <a:rPr lang="zh-CN" dirty="0"/>
+              <a:t>课堂实操（40 分钟，不看答案）：</a:t>
+            </a:r>
+          </a:p>
+          <a:p>
+            <a:r>
+              <a:rPr lang="zh-CN" dirty="0"/>
+              <a:t>· 限时 25 分钟独立完成基础档</a:t>
+            </a:r>
+          </a:p>
+          <a:p>
+            <a:r>
+              <a:rPr lang="zh-CN" dirty="0"/>
+              <a:t>· 写一个 BMI 计算器并格式化输出</a:t>
+            </a:r>
+          </a:p>
+          <a:p>
+            <a:r>
+              <a:rPr lang="zh-CN" dirty="0"/>
+              <a:t/>
+            </a:r>
+          </a:p>
+          <a:p>
+            <a:r>
+              <a:rPr lang="zh-CN" dirty="0"/>
+              <a:t>课后作业：</a:t>
+            </a:r>
+          </a:p>
+          <a:p>
+            <a:r>
+              <a:rPr lang="zh-CN" dirty="0"/>
+              <a:t>· 完成进阶档 1-5 ~ 1-8</a:t>
+            </a:r>
+          </a:p>
+          <a:p>
+            <a:r>
+              <a:rPr lang="zh-CN" dirty="0"/>
+              <a:t>· 产出：个人偏好调查问卷</a:t>
+            </a:r>
+          </a:p>
+          <a:p>
+            <a:r>
+              <a:rPr lang="zh-CN" dirty="0"/>
+              <a:t/>
+            </a:r>
+          </a:p>
+          <a:p>
+            <a:r>
+              <a:rPr lang="zh-CN" dirty="0"/>
+              <a:t>节奏：讲 20 分钟 → 学员自己敲 40 分钟（不看答案）→ 对讲评自查 20 分钟 → 写作业 10 分钟。</a:t>
+            </a:r>
+          </a:p>
+        </p:txBody>
+      </p:sp>
+    </p:spTree>
+  </p:cSld>
+  <p:clrMapOvr>
+    <a:masterClrMapping/>
+  </p:clrMapOvr>
+</p:notes>
+</file>
+
+<file path=ppt/notesSlides/notesSlide7.xml><?xml version="1.0" encoding="utf-8"?>
+<p:notes xmlns:a="http://schemas.openxmlformats.org/drawingml/2006/main" xmlns:p="http://schemas.openxmlformats.org/presentationml/2006/main" xmlns:r="http://schemas.openxmlformats.org/officeDocument/2006/relationships">
+  <p:cSld>
+    <p:spTree>
+      <p:nvGrpSpPr>
+        <p:cNvPr id="1" name=""/>
+        <p:cNvGrpSpPr/>
+        <p:nvPr/>
+      </p:nvGrpSpPr>
+      <p:grpSpPr>
+        <a:xfrm>
+          <a:off x="0" y="0"/>
+          <a:ext cx="0" cy="0"/>
+          <a:chOff x="0" y="0"/>
+          <a:chExt cx="0" cy="0"/>
+        </a:xfrm>
+      </p:grpSpPr>
+      <p:sp>
+        <p:nvSpPr>
+          <p:cNvPr id="2" name="讲课提示"/>
+          <p:cNvSpPr txBox="1"/>
+          <p:nvPr/>
+        </p:nvSpPr>
+        <p:spPr>
+          <a:xfrm>
+            <a:off x="457200" y="457200"/>
+            <a:ext cx="6858000" cy="4800600"/>
+          </a:xfrm>
+          <a:prstGeom prst="rect">
+            <a:avLst/>
+          </a:prstGeom>
+        </p:spPr>
+        <p:txBody>
+          <a:bodyPr wrap="square"/>
+          <a:lstStyle/>
+          <a:p>
+            <a:r>
+              <a:rPr lang="zh-CN" dirty="0"/>
+              <a:t>第 8 节 · 核心知识点：动手实战与答案讲评</a:t>
+            </a:r>
+          </a:p>
+          <a:p>
+            <a:r>
+              <a:rPr lang="zh-CN" dirty="0"/>
+              <a:t/>
+            </a:r>
+          </a:p>
+          <a:p>
+            <a:r>
+              <a:rPr lang="zh-CN" dirty="0"/>
+              <a:t>讲这一页时：先让学生说出上节课的结论，再逐块讲要点。</a:t>
+            </a:r>
+          </a:p>
+          <a:p>
+            <a:r>
+              <a:rPr lang="zh-CN" dirty="0"/>
+              <a:t>每讲完一块，问一句「这一步如果写错了，报错会长什么样？」——把错误提前讲。</a:t>
+            </a:r>
+          </a:p>
+          <a:p>
+            <a:r>
+              <a:rPr lang="zh-CN" dirty="0"/>
+              <a:t/>
+            </a:r>
+          </a:p>
+          <a:p>
+            <a:r>
+              <a:rPr lang="zh-CN" dirty="0"/>
+              <a:t>本节目标：独立完成单元 1 练习，能解释类型转换的报错原因</a:t>
+            </a:r>
+          </a:p>
+          <a:p>
+            <a:r>
+              <a:rPr lang="zh-CN" dirty="0"/>
+              <a:t/>
+            </a:r>
+          </a:p>
+          <a:p>
+            <a:r>
+              <a:rPr lang="zh-CN" dirty="0"/>
+              <a:t>看不到懂的地方，回讲义对应小节读一遍，再回来对着这页复述一次——能讲出来才算真懂。</a:t>
+            </a:r>
+          </a:p>
+        </p:txBody>
+      </p:sp>
+    </p:spTree>
+  </p:cSld>
+  <p:clrMapOvr>
+    <a:masterClrMapping/>
+  </p:clrMapOvr>
+</p:notes>
+</file>
+
+<file path=ppt/notesSlides/notesSlide8.xml><?xml version="1.0" encoding="utf-8"?>
+<p:notes xmlns:a="http://schemas.openxmlformats.org/drawingml/2006/main" xmlns:p="http://schemas.openxmlformats.org/presentationml/2006/main" xmlns:r="http://schemas.openxmlformats.org/officeDocument/2006/relationships">
+  <p:cSld>
+    <p:spTree>
+      <p:nvGrpSpPr>
+        <p:cNvPr id="1" name=""/>
+        <p:cNvGrpSpPr/>
+        <p:nvPr/>
+      </p:nvGrpSpPr>
+      <p:grpSpPr>
+        <a:xfrm>
+          <a:off x="0" y="0"/>
+          <a:ext cx="0" cy="0"/>
+          <a:chOff x="0" y="0"/>
+          <a:chExt cx="0" cy="0"/>
+        </a:xfrm>
+      </p:grpSpPr>
+      <p:sp>
+        <p:nvSpPr>
+          <p:cNvPr id="2" name="讲课提示"/>
+          <p:cNvSpPr txBox="1"/>
+          <p:nvPr/>
+        </p:nvSpPr>
+        <p:spPr>
+          <a:xfrm>
+            <a:off x="457200" y="457200"/>
+            <a:ext cx="6858000" cy="4800600"/>
+          </a:xfrm>
+          <a:prstGeom prst="rect">
+            <a:avLst/>
+          </a:prstGeom>
+        </p:spPr>
+        <p:txBody>
+          <a:bodyPr wrap="square"/>
+          <a:lstStyle/>
+          <a:p>
+            <a:r>
+              <a:rPr lang="zh-CN" dirty="0"/>
+              <a:t>第 9 节 · 单元 1 验收复盘</a:t>
+            </a:r>
+          </a:p>
+          <a:p>
+            <a:r>
+              <a:rPr lang="zh-CN" dirty="0"/>
+              <a:t>单元 1 · 变量与简单数据类型 · W1</a:t>
+            </a:r>
+          </a:p>
+          <a:p>
+            <a:r>
+              <a:rPr lang="zh-CN" dirty="0"/>
+              <a:t/>
+            </a:r>
+          </a:p>
+          <a:p>
+            <a:r>
+              <a:rPr lang="zh-CN" dirty="0"/>
+              <a:t>学习目标：确认四种类型、命名规范、类型转换都过关</a:t>
+            </a:r>
+          </a:p>
+          <a:p>
+            <a:r>
+              <a:rPr lang="zh-CN" dirty="0"/>
+              <a:t/>
+            </a:r>
+          </a:p>
+          <a:p>
+            <a:r>
+              <a:rPr lang="zh-CN" dirty="0"/>
+              <a:t>课堂实操（40 分钟，不看答案）：</a:t>
+            </a:r>
+          </a:p>
+          <a:p>
+            <a:r>
+              <a:rPr lang="zh-CN" dirty="0"/>
+              <a:t>· 逐条打勾验收自测</a:t>
+            </a:r>
+          </a:p>
+          <a:p>
+            <a:r>
+              <a:rPr lang="zh-CN" dirty="0"/>
+              <a:t>· 互相考 5 个最易错的类型题</a:t>
+            </a:r>
+          </a:p>
+          <a:p>
+            <a:r>
+              <a:rPr lang="zh-CN" dirty="0"/>
+              <a:t/>
+            </a:r>
+          </a:p>
+          <a:p>
+            <a:r>
+              <a:rPr lang="zh-CN" dirty="0"/>
+              <a:t>课后作业：</a:t>
+            </a:r>
+          </a:p>
+          <a:p>
+            <a:r>
+              <a:rPr lang="zh-CN" dirty="0"/>
+              <a:t>· 完成本单元小结与产出检查</a:t>
+            </a:r>
+          </a:p>
+          <a:p>
+            <a:r>
+              <a:rPr lang="zh-CN" dirty="0"/>
+              <a:t/>
+            </a:r>
+          </a:p>
+          <a:p>
+            <a:r>
+              <a:rPr lang="zh-CN" dirty="0"/>
+              <a:t>节奏：讲 20 分钟 → 学员自己敲 40 分钟（不看答案）→ 对讲评自查 20 分钟 → 写作业 10 分钟。</a:t>
+            </a:r>
+          </a:p>
+        </p:txBody>
+      </p:sp>
+    </p:spTree>
+  </p:cSld>
+  <p:clrMapOvr>
+    <a:masterClrMapping/>
+  </p:clrMapOvr>
+</p:notes>
+</file>
+
+<file path=ppt/notesSlides/notesSlide9.xml><?xml version="1.0" encoding="utf-8"?>
+<p:notes xmlns:a="http://schemas.openxmlformats.org/drawingml/2006/main" xmlns:p="http://schemas.openxmlformats.org/presentationml/2006/main" xmlns:r="http://schemas.openxmlformats.org/officeDocument/2006/relationships">
+  <p:cSld>
+    <p:spTree>
+      <p:nvGrpSpPr>
+        <p:cNvPr id="1" name=""/>
+        <p:cNvGrpSpPr/>
+        <p:nvPr/>
+      </p:nvGrpSpPr>
+      <p:grpSpPr>
+        <a:xfrm>
+          <a:off x="0" y="0"/>
+          <a:ext cx="0" cy="0"/>
+          <a:chOff x="0" y="0"/>
+          <a:chExt cx="0" cy="0"/>
+        </a:xfrm>
+      </p:grpSpPr>
+      <p:sp>
+        <p:nvSpPr>
+          <p:cNvPr id="2" name="讲课提示"/>
+          <p:cNvSpPr txBox="1"/>
+          <p:nvPr/>
+        </p:nvSpPr>
+        <p:spPr>
+          <a:xfrm>
+            <a:off x="457200" y="457200"/>
+            <a:ext cx="6858000" cy="4800600"/>
+          </a:xfrm>
+          <a:prstGeom prst="rect">
+            <a:avLst/>
+          </a:prstGeom>
+        </p:spPr>
+        <p:txBody>
+          <a:bodyPr wrap="square"/>
+          <a:lstStyle/>
+          <a:p>
+            <a:r>
+              <a:rPr lang="zh-CN" dirty="0"/>
+              <a:t>第 9 节 · 核心知识点：单元 1 验收复盘</a:t>
+            </a:r>
+          </a:p>
+          <a:p>
+            <a:r>
+              <a:rPr lang="zh-CN" dirty="0"/>
+              <a:t/>
+            </a:r>
+          </a:p>
+          <a:p>
+            <a:r>
+              <a:rPr lang="zh-CN" dirty="0"/>
+              <a:t>讲这一页时：先让学生说出上节课的结论，再逐块讲要点。</a:t>
+            </a:r>
+          </a:p>
+          <a:p>
+            <a:r>
+              <a:rPr lang="zh-CN" dirty="0"/>
+              <a:t>每讲完一块，问一句「这一步如果写错了，报错会长什么样？」——把错误提前讲。</a:t>
+            </a:r>
+          </a:p>
+          <a:p>
+            <a:r>
+              <a:rPr lang="zh-CN" dirty="0"/>
+              <a:t/>
+            </a:r>
+          </a:p>
+          <a:p>
+            <a:r>
+              <a:rPr lang="zh-CN" dirty="0"/>
+              <a:t>本节目标：确认四种类型、命名规范、类型转换都过关</a:t>
+            </a:r>
+          </a:p>
+          <a:p>
+            <a:r>
+              <a:rPr lang="zh-CN" dirty="0"/>
+              <a:t/>
+            </a:r>
+          </a:p>
+          <a:p>
+            <a:r>
+              <a:rPr lang="zh-CN" dirty="0"/>
+              <a:t>看不到懂的地方，回讲义对应小节读一遍，再回来对着这页复述一次——能讲出来才算真懂。</a:t>
+            </a:r>
+          </a:p>
+        </p:txBody>
+      </p:sp>
+    </p:spTree>
+  </p:cSld>
+  <p:clrMapOvr>
+    <a:masterClrMapping/>
+  </p:clrMapOvr>
+</p:notes>
 </file>
 
 <file path=ppt/slideLayouts/slideLayout1.xml><?xml version="1.0" encoding="utf-8"?>
